--- a/output/wordlabs-al-suffix-3day.pptx
+++ b/output/wordlabs-al-suffix-3day.pptx
@@ -6057,7 +6057,7 @@
                 <a:ea typeface="Calibri" pitchFamily="34" charset="-122"/>
                 <a:cs typeface="Calibri" pitchFamily="34" charset="-120"/>
               </a:rPr>
-              <a:t>tropical</a:t>
+              <a:t>coastal</a:t>
             </a:r>
             <a:pPr algn="l" indent="0" marL="0">
               <a:buNone/>
@@ -6071,7 +6071,7 @@
                 <a:ea typeface="Calibri" pitchFamily="34" charset="-122"/>
                 <a:cs typeface="Calibri" pitchFamily="34" charset="-120"/>
               </a:rPr>
-              <a:t> rainforest is a </a:t>
+              <a:t> town held its </a:t>
             </a:r>
             <a:pPr algn="l" indent="0" marL="0">
               <a:buNone/>
@@ -6088,7 +6088,7 @@
                 <a:ea typeface="Calibri" pitchFamily="34" charset="-122"/>
                 <a:cs typeface="Calibri" pitchFamily="34" charset="-120"/>
               </a:rPr>
-              <a:t>natural</a:t>
+              <a:t>annual</a:t>
             </a:r>
             <a:pPr algn="l" indent="0" marL="0">
               <a:buNone/>
@@ -6102,7 +6102,7 @@
                 <a:ea typeface="Calibri" pitchFamily="34" charset="-122"/>
                 <a:cs typeface="Calibri" pitchFamily="34" charset="-120"/>
               </a:rPr>
-              <a:t> wonder of the world.</a:t>
+              <a:t> festival by the sea.</a:t>
             </a:r>
             <a:endParaRPr lang="en-US" sz="1800" dirty="0"/>
           </a:p>
@@ -6257,7 +6257,7 @@
                 <a:ea typeface="Trebuchet MS" pitchFamily="34" charset="-122"/>
                 <a:cs typeface="Trebuchet MS" pitchFamily="34" charset="-120"/>
               </a:rPr>
-              <a:t>tropical</a:t>
+              <a:t>coastal</a:t>
             </a:r>
             <a:endParaRPr lang="en-US" sz="1400" dirty="0"/>
           </a:p>
@@ -6385,7 +6385,7 @@
                 <a:ea typeface="Trebuchet MS" pitchFamily="34" charset="-122"/>
                 <a:cs typeface="Trebuchet MS" pitchFamily="34" charset="-120"/>
               </a:rPr>
-              <a:t>natural</a:t>
+              <a:t>annual</a:t>
             </a:r>
             <a:endParaRPr lang="en-US" sz="1400" dirty="0"/>
           </a:p>
@@ -6855,7 +6855,7 @@
                 <a:ea typeface="Trebuchet MS" pitchFamily="34" charset="-122"/>
                 <a:cs typeface="Trebuchet MS" pitchFamily="34" charset="-120"/>
               </a:rPr>
-              <a:t>tropical</a:t>
+              <a:t>coastal</a:t>
             </a:r>
             <a:endParaRPr lang="en-US" sz="2800" dirty="0"/>
           </a:p>
@@ -7682,7 +7682,7 @@
                 <a:ea typeface="Trebuchet MS" pitchFamily="34" charset="-122"/>
                 <a:cs typeface="Trebuchet MS" pitchFamily="34" charset="-120"/>
               </a:rPr>
-              <a:t>tropical</a:t>
+              <a:t>coastal</a:t>
             </a:r>
             <a:endParaRPr lang="en-US" sz="2800" dirty="0"/>
           </a:p>
@@ -7821,7 +7821,7 @@
                 <a:ea typeface="Trebuchet MS" pitchFamily="34" charset="-122"/>
                 <a:cs typeface="Trebuchet MS" pitchFamily="34" charset="-120"/>
               </a:rPr>
-              <a:t>tropic</a:t>
+              <a:t>coast</a:t>
             </a:r>
             <a:endParaRPr lang="en-US" sz="1300" dirty="0"/>
           </a:p>
@@ -7860,7 +7860,7 @@
                 <a:ea typeface="Calibri" pitchFamily="34" charset="-122"/>
                 <a:cs typeface="Calibri" pitchFamily="34" charset="-120"/>
               </a:rPr>
-              <a:t>the tropics (hot region near equator)</a:t>
+              <a:t>land beside the sea</a:t>
             </a:r>
             <a:endParaRPr lang="en-US" sz="850" dirty="0"/>
           </a:p>
@@ -8667,7 +8667,7 @@
                 <a:ea typeface="Trebuchet MS" pitchFamily="34" charset="-122"/>
                 <a:cs typeface="Trebuchet MS" pitchFamily="34" charset="-120"/>
               </a:rPr>
-              <a:t>tropical</a:t>
+              <a:t>coastal</a:t>
             </a:r>
             <a:endParaRPr lang="en-US" sz="2800" dirty="0"/>
           </a:p>
@@ -8806,7 +8806,7 @@
                 <a:ea typeface="Trebuchet MS" pitchFamily="34" charset="-122"/>
                 <a:cs typeface="Trebuchet MS" pitchFamily="34" charset="-120"/>
               </a:rPr>
-              <a:t>tropic</a:t>
+              <a:t>coast</a:t>
             </a:r>
             <a:endParaRPr lang="en-US" sz="1300" dirty="0"/>
           </a:p>
@@ -8845,7 +8845,7 @@
                 <a:ea typeface="Calibri" pitchFamily="34" charset="-122"/>
                 <a:cs typeface="Calibri" pitchFamily="34" charset="-120"/>
               </a:rPr>
-              <a:t>the tropics (hot region near equator)</a:t>
+              <a:t>land beside the sea</a:t>
             </a:r>
             <a:endParaRPr lang="en-US" sz="850" dirty="0"/>
           </a:p>
@@ -9064,7 +9064,7 @@
         </p:nvSpPr>
         <p:spPr>
           <a:xfrm>
-            <a:off x="2313432" y="3364992"/>
+            <a:off x="2999232" y="3364992"/>
             <a:ext cx="1645920" cy="475488"/>
           </a:xfrm>
           <a:prstGeom prst="rect">
@@ -9091,7 +9091,7 @@
         </p:nvSpPr>
         <p:spPr>
           <a:xfrm>
-            <a:off x="2313432" y="3364992"/>
+            <a:off x="2999232" y="3364992"/>
             <a:ext cx="1645920" cy="475488"/>
           </a:xfrm>
           <a:prstGeom prst="rect">
@@ -9116,7 +9116,7 @@
                 <a:ea typeface="Trebuchet MS" pitchFamily="34" charset="-122"/>
                 <a:cs typeface="Trebuchet MS" pitchFamily="34" charset="-120"/>
               </a:rPr>
-              <a:t>trop</a:t>
+              <a:t>coast</a:t>
             </a:r>
             <a:endParaRPr lang="en-US" sz="1400" dirty="0"/>
           </a:p>
@@ -9130,8 +9130,8 @@
         </p:nvSpPr>
         <p:spPr>
           <a:xfrm>
-            <a:off x="3959352" y="3364992"/>
-            <a:ext cx="411480" cy="475488"/>
+            <a:off x="4645152" y="3364992"/>
+            <a:ext cx="1097280" cy="475488"/>
           </a:xfrm>
           <a:prstGeom prst="rect">
             <a:avLst/>
@@ -9169,7 +9169,7 @@
         </p:nvSpPr>
         <p:spPr>
           <a:xfrm>
-            <a:off x="4370832" y="3364992"/>
+            <a:off x="5742432" y="3364992"/>
             <a:ext cx="1645920" cy="475488"/>
           </a:xfrm>
           <a:prstGeom prst="rect">
@@ -9196,7 +9196,7 @@
         </p:nvSpPr>
         <p:spPr>
           <a:xfrm>
-            <a:off x="4370832" y="3364992"/>
+            <a:off x="5742432" y="3364992"/>
             <a:ext cx="1645920" cy="475488"/>
           </a:xfrm>
           <a:prstGeom prst="rect">
@@ -9221,7 +9221,7 @@
                 <a:ea typeface="Trebuchet MS" pitchFamily="34" charset="-122"/>
                 <a:cs typeface="Trebuchet MS" pitchFamily="34" charset="-120"/>
               </a:rPr>
-              <a:t>i</a:t>
+              <a:t>al</a:t>
             </a:r>
             <a:endParaRPr lang="en-US" sz="1400" dirty="0"/>
           </a:p>
@@ -9229,119 +9229,80 @@
       </p:sp>
       <p:sp>
         <p:nvSpPr>
-          <p:cNvPr id="30" name="Text 28"/>
-          <p:cNvSpPr/>
-          <p:nvPr/>
-        </p:nvSpPr>
-        <p:spPr>
-          <a:xfrm>
-            <a:off x="6016752" y="3364992"/>
-            <a:ext cx="411480" cy="475488"/>
-          </a:xfrm>
-          <a:prstGeom prst="rect">
-            <a:avLst/>
-          </a:prstGeom>
-          <a:noFill/>
-          <a:ln/>
-        </p:spPr>
-        <p:txBody>
-          <a:bodyPr wrap="square" lIns="0" tIns="0" rIns="0" bIns="0" rtlCol="0" anchor="ctr"/>
-          <a:lstStyle/>
-          <a:p>
-            <a:pPr algn="ctr" indent="0" marL="0">
-              <a:buNone/>
-            </a:pPr>
-            <a:r>
-              <a:rPr lang="en-US" sz="1600" b="1" dirty="0">
-                <a:solidFill>
-                  <a:srgbClr val="0D9488"/>
+          <p:cNvPr id="30" name="Shape 28"/>
+          <p:cNvSpPr/>
+          <p:nvPr/>
+        </p:nvSpPr>
+        <p:spPr>
+          <a:xfrm>
+            <a:off x="365760" y="4096512"/>
+            <a:ext cx="1371600" cy="804672"/>
+          </a:xfrm>
+          <a:prstGeom prst="rect">
+            <a:avLst>
+              <a:gd name="adj" fmla="val 6818"/>
+            </a:avLst>
+          </a:prstGeom>
+          <a:solidFill>
+            <a:srgbClr val="E2E8F0"/>
+          </a:solidFill>
+          <a:ln w="12700">
+            <a:solidFill>
+              <a:srgbClr val="E2E8F0"/>
+            </a:solidFill>
+            <a:prstDash val="solid"/>
+          </a:ln>
+        </p:spPr>
+      </p:sp>
+      <p:sp>
+        <p:nvSpPr>
+          <p:cNvPr id="31" name="Text 29"/>
+          <p:cNvSpPr/>
+          <p:nvPr/>
+        </p:nvSpPr>
+        <p:spPr>
+          <a:xfrm>
+            <a:off x="365760" y="4096512"/>
+            <a:ext cx="1371600" cy="804672"/>
+          </a:xfrm>
+          <a:prstGeom prst="rect">
+            <a:avLst/>
+          </a:prstGeom>
+          <a:noFill/>
+          <a:ln/>
+        </p:spPr>
+        <p:txBody>
+          <a:bodyPr wrap="square" lIns="0" tIns="0" rIns="0" bIns="0" rtlCol="0" anchor="ctr"/>
+          <a:lstStyle/>
+          <a:p>
+            <a:pPr algn="ctr" indent="0" marL="0">
+              <a:buNone/>
+            </a:pPr>
+            <a:r>
+              <a:rPr lang="en-US" sz="1100" b="1" dirty="0">
+                <a:solidFill>
+                  <a:srgbClr val="475569"/>
                 </a:solidFill>
                 <a:latin typeface="Trebuchet MS" pitchFamily="34" charset="0"/>
                 <a:ea typeface="Trebuchet MS" pitchFamily="34" charset="-122"/>
                 <a:cs typeface="Trebuchet MS" pitchFamily="34" charset="-120"/>
               </a:rPr>
-              <a:t>·</a:t>
-            </a:r>
-            <a:endParaRPr lang="en-US" sz="1600" dirty="0"/>
-          </a:p>
-        </p:txBody>
-      </p:sp>
-      <p:sp>
-        <p:nvSpPr>
-          <p:cNvPr id="31" name="Shape 29"/>
-          <p:cNvSpPr/>
-          <p:nvPr/>
-        </p:nvSpPr>
-        <p:spPr>
-          <a:xfrm>
-            <a:off x="6428232" y="3364992"/>
-            <a:ext cx="1645920" cy="475488"/>
-          </a:xfrm>
-          <a:prstGeom prst="rect">
-            <a:avLst>
-              <a:gd name="adj" fmla="val 9615"/>
-            </a:avLst>
-          </a:prstGeom>
-          <a:solidFill>
-            <a:srgbClr val="FFFFFF"/>
-          </a:solidFill>
-          <a:ln w="12700">
-            <a:solidFill>
-              <a:srgbClr val="0D9488"/>
-            </a:solidFill>
-            <a:prstDash val="solid"/>
-          </a:ln>
-        </p:spPr>
-      </p:sp>
-      <p:sp>
-        <p:nvSpPr>
-          <p:cNvPr id="32" name="Text 30"/>
-          <p:cNvSpPr/>
-          <p:nvPr/>
-        </p:nvSpPr>
-        <p:spPr>
-          <a:xfrm>
-            <a:off x="6428232" y="3364992"/>
-            <a:ext cx="1645920" cy="475488"/>
-          </a:xfrm>
-          <a:prstGeom prst="rect">
-            <a:avLst/>
-          </a:prstGeom>
-          <a:noFill/>
-          <a:ln/>
-        </p:spPr>
-        <p:txBody>
-          <a:bodyPr wrap="square" lIns="0" tIns="0" rIns="0" bIns="0" rtlCol="0" anchor="ctr"/>
-          <a:lstStyle/>
-          <a:p>
-            <a:pPr algn="ctr" indent="0" marL="0">
-              <a:buNone/>
-            </a:pPr>
-            <a:r>
-              <a:rPr lang="en-US" sz="1400" b="1" dirty="0">
-                <a:solidFill>
-                  <a:srgbClr val="0D9488"/>
-                </a:solidFill>
-                <a:latin typeface="Trebuchet MS" pitchFamily="34" charset="0"/>
-                <a:ea typeface="Trebuchet MS" pitchFamily="34" charset="-122"/>
-                <a:cs typeface="Trebuchet MS" pitchFamily="34" charset="-120"/>
-              </a:rPr>
-              <a:t>cal</a:t>
-            </a:r>
-            <a:endParaRPr lang="en-US" sz="1400" dirty="0"/>
-          </a:p>
-        </p:txBody>
-      </p:sp>
-      <p:sp>
-        <p:nvSpPr>
-          <p:cNvPr id="33" name="Shape 31"/>
-          <p:cNvSpPr/>
-          <p:nvPr/>
-        </p:nvSpPr>
-        <p:spPr>
-          <a:xfrm>
-            <a:off x="365760" y="4096512"/>
-            <a:ext cx="1371600" cy="804672"/>
+              <a:t>Phonemes</a:t>
+            </a:r>
+            <a:endParaRPr lang="en-US" sz="1100" dirty="0"/>
+          </a:p>
+        </p:txBody>
+      </p:sp>
+      <p:sp>
+        <p:nvSpPr>
+          <p:cNvPr id="32" name="Shape 30"/>
+          <p:cNvSpPr/>
+          <p:nvPr/>
+        </p:nvSpPr>
+        <p:spPr>
+          <a:xfrm>
+            <a:off x="1874520" y="4096512"/>
+            <a:ext cx="6903720" cy="804672"/>
           </a:xfrm>
           <a:prstGeom prst="rect">
             <a:avLst>
@@ -9349,85 +9310,19 @@
             </a:avLst>
           </a:prstGeom>
           <a:solidFill>
-            <a:srgbClr val="E2E8F0"/>
+            <a:srgbClr val="F8FAFC"/>
           </a:solidFill>
           <a:ln w="12700">
             <a:solidFill>
               <a:srgbClr val="E2E8F0"/>
             </a:solidFill>
-            <a:prstDash val="solid"/>
-          </a:ln>
-        </p:spPr>
-      </p:sp>
-      <p:sp>
-        <p:nvSpPr>
-          <p:cNvPr id="34" name="Text 32"/>
-          <p:cNvSpPr/>
-          <p:nvPr/>
-        </p:nvSpPr>
-        <p:spPr>
-          <a:xfrm>
-            <a:off x="365760" y="4096512"/>
-            <a:ext cx="1371600" cy="804672"/>
-          </a:xfrm>
-          <a:prstGeom prst="rect">
-            <a:avLst/>
-          </a:prstGeom>
-          <a:noFill/>
-          <a:ln/>
-        </p:spPr>
-        <p:txBody>
-          <a:bodyPr wrap="square" lIns="0" tIns="0" rIns="0" bIns="0" rtlCol="0" anchor="ctr"/>
-          <a:lstStyle/>
-          <a:p>
-            <a:pPr algn="ctr" indent="0" marL="0">
-              <a:buNone/>
-            </a:pPr>
-            <a:r>
-              <a:rPr lang="en-US" sz="1100" b="1" dirty="0">
-                <a:solidFill>
-                  <a:srgbClr val="475569"/>
-                </a:solidFill>
-                <a:latin typeface="Trebuchet MS" pitchFamily="34" charset="0"/>
-                <a:ea typeface="Trebuchet MS" pitchFamily="34" charset="-122"/>
-                <a:cs typeface="Trebuchet MS" pitchFamily="34" charset="-120"/>
-              </a:rPr>
-              <a:t>Phonemes</a:t>
-            </a:r>
-            <a:endParaRPr lang="en-US" sz="1100" dirty="0"/>
-          </a:p>
-        </p:txBody>
-      </p:sp>
-      <p:sp>
-        <p:nvSpPr>
-          <p:cNvPr id="35" name="Shape 33"/>
-          <p:cNvSpPr/>
-          <p:nvPr/>
-        </p:nvSpPr>
-        <p:spPr>
-          <a:xfrm>
-            <a:off x="1874520" y="4096512"/>
-            <a:ext cx="6903720" cy="804672"/>
-          </a:xfrm>
-          <a:prstGeom prst="rect">
-            <a:avLst>
-              <a:gd name="adj" fmla="val 6818"/>
-            </a:avLst>
-          </a:prstGeom>
-          <a:solidFill>
-            <a:srgbClr val="F8FAFC"/>
-          </a:solidFill>
-          <a:ln w="12700">
-            <a:solidFill>
-              <a:srgbClr val="E2E8F0"/>
-            </a:solidFill>
             <a:prstDash val="dash"/>
           </a:ln>
         </p:spPr>
       </p:sp>
       <p:sp>
         <p:nvSpPr>
-          <p:cNvPr id="36" name="Text 34"/>
+          <p:cNvPr id="33" name="Text 31"/>
           <p:cNvSpPr/>
           <p:nvPr/>
         </p:nvSpPr>
@@ -9889,7 +9784,7 @@
                 <a:ea typeface="Trebuchet MS" pitchFamily="34" charset="-122"/>
                 <a:cs typeface="Trebuchet MS" pitchFamily="34" charset="-120"/>
               </a:rPr>
-              <a:t>tropical</a:t>
+              <a:t>coastal</a:t>
             </a:r>
             <a:endParaRPr lang="en-US" sz="2800" dirty="0"/>
           </a:p>
@@ -10028,7 +9923,7 @@
                 <a:ea typeface="Trebuchet MS" pitchFamily="34" charset="-122"/>
                 <a:cs typeface="Trebuchet MS" pitchFamily="34" charset="-120"/>
               </a:rPr>
-              <a:t>tropic</a:t>
+              <a:t>coast</a:t>
             </a:r>
             <a:endParaRPr lang="en-US" sz="1300" dirty="0"/>
           </a:p>
@@ -10067,7 +9962,7 @@
                 <a:ea typeface="Calibri" pitchFamily="34" charset="-122"/>
                 <a:cs typeface="Calibri" pitchFamily="34" charset="-120"/>
               </a:rPr>
-              <a:t>the tropics (hot region near equator)</a:t>
+              <a:t>land beside the sea</a:t>
             </a:r>
             <a:endParaRPr lang="en-US" sz="850" dirty="0"/>
           </a:p>
@@ -10286,7 +10181,7 @@
         </p:nvSpPr>
         <p:spPr>
           <a:xfrm>
-            <a:off x="2313432" y="3364992"/>
+            <a:off x="2999232" y="3364992"/>
             <a:ext cx="1645920" cy="475488"/>
           </a:xfrm>
           <a:prstGeom prst="rect">
@@ -10313,7 +10208,7 @@
         </p:nvSpPr>
         <p:spPr>
           <a:xfrm>
-            <a:off x="2313432" y="3364992"/>
+            <a:off x="2999232" y="3364992"/>
             <a:ext cx="1645920" cy="475488"/>
           </a:xfrm>
           <a:prstGeom prst="rect">
@@ -10338,7 +10233,7 @@
                 <a:ea typeface="Trebuchet MS" pitchFamily="34" charset="-122"/>
                 <a:cs typeface="Trebuchet MS" pitchFamily="34" charset="-120"/>
               </a:rPr>
-              <a:t>trop</a:t>
+              <a:t>coast</a:t>
             </a:r>
             <a:endParaRPr lang="en-US" sz="1400" dirty="0"/>
           </a:p>
@@ -10352,8 +10247,8 @@
         </p:nvSpPr>
         <p:spPr>
           <a:xfrm>
-            <a:off x="3959352" y="3364992"/>
-            <a:ext cx="411480" cy="475488"/>
+            <a:off x="4645152" y="3364992"/>
+            <a:ext cx="1097280" cy="475488"/>
           </a:xfrm>
           <a:prstGeom prst="rect">
             <a:avLst/>
@@ -10391,7 +10286,7 @@
         </p:nvSpPr>
         <p:spPr>
           <a:xfrm>
-            <a:off x="4370832" y="3364992"/>
+            <a:off x="5742432" y="3364992"/>
             <a:ext cx="1645920" cy="475488"/>
           </a:xfrm>
           <a:prstGeom prst="rect">
@@ -10418,7 +10313,7 @@
         </p:nvSpPr>
         <p:spPr>
           <a:xfrm>
-            <a:off x="4370832" y="3364992"/>
+            <a:off x="5742432" y="3364992"/>
             <a:ext cx="1645920" cy="475488"/>
           </a:xfrm>
           <a:prstGeom prst="rect">
@@ -10443,7 +10338,7 @@
                 <a:ea typeface="Trebuchet MS" pitchFamily="34" charset="-122"/>
                 <a:cs typeface="Trebuchet MS" pitchFamily="34" charset="-120"/>
               </a:rPr>
-              <a:t>i</a:t>
+              <a:t>al</a:t>
             </a:r>
             <a:endParaRPr lang="en-US" sz="1400" dirty="0"/>
           </a:p>
@@ -10451,193 +10346,247 @@
       </p:sp>
       <p:sp>
         <p:nvSpPr>
-          <p:cNvPr id="30" name="Text 28"/>
-          <p:cNvSpPr/>
-          <p:nvPr/>
-        </p:nvSpPr>
-        <p:spPr>
-          <a:xfrm>
-            <a:off x="6016752" y="3364992"/>
-            <a:ext cx="411480" cy="475488"/>
-          </a:xfrm>
-          <a:prstGeom prst="rect">
-            <a:avLst/>
-          </a:prstGeom>
-          <a:noFill/>
-          <a:ln/>
-        </p:spPr>
-        <p:txBody>
-          <a:bodyPr wrap="square" lIns="0" tIns="0" rIns="0" bIns="0" rtlCol="0" anchor="ctr"/>
-          <a:lstStyle/>
-          <a:p>
-            <a:pPr algn="ctr" indent="0" marL="0">
-              <a:buNone/>
-            </a:pPr>
-            <a:r>
-              <a:rPr lang="en-US" sz="1600" b="1" dirty="0">
-                <a:solidFill>
-                  <a:srgbClr val="0D9488"/>
+          <p:cNvPr id="30" name="Shape 28"/>
+          <p:cNvSpPr/>
+          <p:nvPr/>
+        </p:nvSpPr>
+        <p:spPr>
+          <a:xfrm>
+            <a:off x="365760" y="4096512"/>
+            <a:ext cx="1371600" cy="804672"/>
+          </a:xfrm>
+          <a:prstGeom prst="rect">
+            <a:avLst>
+              <a:gd name="adj" fmla="val 6818"/>
+            </a:avLst>
+          </a:prstGeom>
+          <a:solidFill>
+            <a:srgbClr val="E2E8F0"/>
+          </a:solidFill>
+          <a:ln w="12700">
+            <a:solidFill>
+              <a:srgbClr val="E2E8F0"/>
+            </a:solidFill>
+            <a:prstDash val="solid"/>
+          </a:ln>
+        </p:spPr>
+      </p:sp>
+      <p:sp>
+        <p:nvSpPr>
+          <p:cNvPr id="31" name="Text 29"/>
+          <p:cNvSpPr/>
+          <p:nvPr/>
+        </p:nvSpPr>
+        <p:spPr>
+          <a:xfrm>
+            <a:off x="365760" y="4096512"/>
+            <a:ext cx="1371600" cy="804672"/>
+          </a:xfrm>
+          <a:prstGeom prst="rect">
+            <a:avLst/>
+          </a:prstGeom>
+          <a:noFill/>
+          <a:ln/>
+        </p:spPr>
+        <p:txBody>
+          <a:bodyPr wrap="square" lIns="0" tIns="0" rIns="0" bIns="0" rtlCol="0" anchor="ctr"/>
+          <a:lstStyle/>
+          <a:p>
+            <a:pPr algn="ctr" indent="0" marL="0">
+              <a:buNone/>
+            </a:pPr>
+            <a:r>
+              <a:rPr lang="en-US" sz="1100" b="1" dirty="0">
+                <a:solidFill>
+                  <a:srgbClr val="475569"/>
                 </a:solidFill>
                 <a:latin typeface="Trebuchet MS" pitchFamily="34" charset="0"/>
                 <a:ea typeface="Trebuchet MS" pitchFamily="34" charset="-122"/>
                 <a:cs typeface="Trebuchet MS" pitchFamily="34" charset="-120"/>
               </a:rPr>
-              <a:t>·</a:t>
-            </a:r>
-            <a:endParaRPr lang="en-US" sz="1600" dirty="0"/>
-          </a:p>
-        </p:txBody>
-      </p:sp>
-      <p:sp>
-        <p:nvSpPr>
-          <p:cNvPr id="31" name="Shape 29"/>
-          <p:cNvSpPr/>
-          <p:nvPr/>
-        </p:nvSpPr>
-        <p:spPr>
-          <a:xfrm>
-            <a:off x="6428232" y="3364992"/>
-            <a:ext cx="1645920" cy="475488"/>
+              <a:t>Phonemes</a:t>
+            </a:r>
+            <a:endParaRPr lang="en-US" sz="1100" dirty="0"/>
+          </a:p>
+        </p:txBody>
+      </p:sp>
+      <p:sp>
+        <p:nvSpPr>
+          <p:cNvPr id="32" name="Shape 30"/>
+          <p:cNvSpPr/>
+          <p:nvPr/>
+        </p:nvSpPr>
+        <p:spPr>
+          <a:xfrm>
+            <a:off x="1874520" y="4096512"/>
+            <a:ext cx="6903720" cy="658368"/>
           </a:xfrm>
           <a:prstGeom prst="rect">
             <a:avLst>
-              <a:gd name="adj" fmla="val 9615"/>
+              <a:gd name="adj" fmla="val 8333"/>
             </a:avLst>
           </a:prstGeom>
           <a:solidFill>
+            <a:srgbClr val="FCE7F3"/>
+          </a:solidFill>
+          <a:ln w="12700">
+            <a:solidFill>
+              <a:srgbClr val="DB2777"/>
+            </a:solidFill>
+            <a:prstDash val="solid"/>
+          </a:ln>
+        </p:spPr>
+      </p:sp>
+      <p:sp>
+        <p:nvSpPr>
+          <p:cNvPr id="33" name="Shape 31"/>
+          <p:cNvSpPr/>
+          <p:nvPr/>
+        </p:nvSpPr>
+        <p:spPr>
+          <a:xfrm>
+            <a:off x="2254649" y="4169664"/>
+            <a:ext cx="685800" cy="475488"/>
+          </a:xfrm>
+          <a:prstGeom prst="rect">
+            <a:avLst>
+              <a:gd name="adj" fmla="val 7692"/>
+            </a:avLst>
+          </a:prstGeom>
+          <a:solidFill>
             <a:srgbClr val="FFFFFF"/>
           </a:solidFill>
           <a:ln w="12700">
             <a:solidFill>
-              <a:srgbClr val="0D9488"/>
-            </a:solidFill>
-            <a:prstDash val="solid"/>
-          </a:ln>
-        </p:spPr>
-      </p:sp>
-      <p:sp>
-        <p:nvSpPr>
-          <p:cNvPr id="32" name="Text 30"/>
-          <p:cNvSpPr/>
-          <p:nvPr/>
-        </p:nvSpPr>
-        <p:spPr>
-          <a:xfrm>
-            <a:off x="6428232" y="3364992"/>
-            <a:ext cx="1645920" cy="475488"/>
-          </a:xfrm>
-          <a:prstGeom prst="rect">
-            <a:avLst/>
-          </a:prstGeom>
-          <a:noFill/>
-          <a:ln/>
-        </p:spPr>
-        <p:txBody>
-          <a:bodyPr wrap="square" lIns="0" tIns="0" rIns="0" bIns="0" rtlCol="0" anchor="ctr"/>
-          <a:lstStyle/>
-          <a:p>
-            <a:pPr algn="ctr" indent="0" marL="0">
-              <a:buNone/>
-            </a:pPr>
-            <a:r>
-              <a:rPr lang="en-US" sz="1400" b="1" dirty="0">
-                <a:solidFill>
-                  <a:srgbClr val="0D9488"/>
+              <a:srgbClr val="DB2777"/>
+            </a:solidFill>
+            <a:prstDash val="solid"/>
+          </a:ln>
+        </p:spPr>
+      </p:sp>
+      <p:sp>
+        <p:nvSpPr>
+          <p:cNvPr id="34" name="Text 32"/>
+          <p:cNvSpPr/>
+          <p:nvPr/>
+        </p:nvSpPr>
+        <p:spPr>
+          <a:xfrm>
+            <a:off x="2254649" y="4169664"/>
+            <a:ext cx="685800" cy="475488"/>
+          </a:xfrm>
+          <a:prstGeom prst="rect">
+            <a:avLst/>
+          </a:prstGeom>
+          <a:noFill/>
+          <a:ln/>
+        </p:spPr>
+        <p:txBody>
+          <a:bodyPr wrap="square" lIns="0" tIns="0" rIns="0" bIns="0" rtlCol="0" anchor="ctr"/>
+          <a:lstStyle/>
+          <a:p>
+            <a:pPr algn="ctr" indent="0" marL="0">
+              <a:buNone/>
+            </a:pPr>
+            <a:r>
+              <a:rPr lang="en-US" sz="900" b="1" dirty="0">
+                <a:solidFill>
+                  <a:srgbClr val="9D174D"/>
                 </a:solidFill>
                 <a:latin typeface="Trebuchet MS" pitchFamily="34" charset="0"/>
                 <a:ea typeface="Trebuchet MS" pitchFamily="34" charset="-122"/>
                 <a:cs typeface="Trebuchet MS" pitchFamily="34" charset="-120"/>
               </a:rPr>
-              <a:t>cal</a:t>
-            </a:r>
-            <a:endParaRPr lang="en-US" sz="1400" dirty="0"/>
-          </a:p>
-        </p:txBody>
-      </p:sp>
-      <p:sp>
-        <p:nvSpPr>
-          <p:cNvPr id="33" name="Shape 31"/>
-          <p:cNvSpPr/>
-          <p:nvPr/>
-        </p:nvSpPr>
-        <p:spPr>
-          <a:xfrm>
-            <a:off x="365760" y="4096512"/>
-            <a:ext cx="1371600" cy="804672"/>
+              <a:t>c</a:t>
+            </a:r>
+            <a:endParaRPr lang="en-US" sz="900" dirty="0"/>
+          </a:p>
+        </p:txBody>
+      </p:sp>
+      <p:sp>
+        <p:nvSpPr>
+          <p:cNvPr id="35" name="Shape 33"/>
+          <p:cNvSpPr/>
+          <p:nvPr/>
+        </p:nvSpPr>
+        <p:spPr>
+          <a:xfrm>
+            <a:off x="3293146" y="4169664"/>
+            <a:ext cx="685800" cy="475488"/>
           </a:xfrm>
           <a:prstGeom prst="rect">
             <a:avLst>
-              <a:gd name="adj" fmla="val 6818"/>
+              <a:gd name="adj" fmla="val 7692"/>
             </a:avLst>
           </a:prstGeom>
           <a:solidFill>
-            <a:srgbClr val="E2E8F0"/>
-          </a:solidFill>
-          <a:ln w="12700">
-            <a:solidFill>
-              <a:srgbClr val="E2E8F0"/>
-            </a:solidFill>
-            <a:prstDash val="solid"/>
-          </a:ln>
-        </p:spPr>
-      </p:sp>
-      <p:sp>
-        <p:nvSpPr>
-          <p:cNvPr id="34" name="Text 32"/>
-          <p:cNvSpPr/>
-          <p:nvPr/>
-        </p:nvSpPr>
-        <p:spPr>
-          <a:xfrm>
-            <a:off x="365760" y="4096512"/>
-            <a:ext cx="1371600" cy="804672"/>
-          </a:xfrm>
-          <a:prstGeom prst="rect">
-            <a:avLst/>
-          </a:prstGeom>
-          <a:noFill/>
-          <a:ln/>
-        </p:spPr>
-        <p:txBody>
-          <a:bodyPr wrap="square" lIns="0" tIns="0" rIns="0" bIns="0" rtlCol="0" anchor="ctr"/>
-          <a:lstStyle/>
-          <a:p>
-            <a:pPr algn="ctr" indent="0" marL="0">
-              <a:buNone/>
-            </a:pPr>
-            <a:r>
-              <a:rPr lang="en-US" sz="1100" b="1" dirty="0">
-                <a:solidFill>
-                  <a:srgbClr val="475569"/>
+            <a:srgbClr val="FFFFFF"/>
+          </a:solidFill>
+          <a:ln w="12700">
+            <a:solidFill>
+              <a:srgbClr val="DB2777"/>
+            </a:solidFill>
+            <a:prstDash val="solid"/>
+          </a:ln>
+        </p:spPr>
+      </p:sp>
+      <p:sp>
+        <p:nvSpPr>
+          <p:cNvPr id="36" name="Text 34"/>
+          <p:cNvSpPr/>
+          <p:nvPr/>
+        </p:nvSpPr>
+        <p:spPr>
+          <a:xfrm>
+            <a:off x="3293146" y="4169664"/>
+            <a:ext cx="685800" cy="475488"/>
+          </a:xfrm>
+          <a:prstGeom prst="rect">
+            <a:avLst/>
+          </a:prstGeom>
+          <a:noFill/>
+          <a:ln/>
+        </p:spPr>
+        <p:txBody>
+          <a:bodyPr wrap="square" lIns="0" tIns="0" rIns="0" bIns="0" rtlCol="0" anchor="ctr"/>
+          <a:lstStyle/>
+          <a:p>
+            <a:pPr algn="ctr" indent="0" marL="0">
+              <a:buNone/>
+            </a:pPr>
+            <a:r>
+              <a:rPr lang="en-US" sz="900" b="1" dirty="0">
+                <a:solidFill>
+                  <a:srgbClr val="9D174D"/>
                 </a:solidFill>
                 <a:latin typeface="Trebuchet MS" pitchFamily="34" charset="0"/>
                 <a:ea typeface="Trebuchet MS" pitchFamily="34" charset="-122"/>
                 <a:cs typeface="Trebuchet MS" pitchFamily="34" charset="-120"/>
               </a:rPr>
-              <a:t>Phonemes</a:t>
-            </a:r>
-            <a:endParaRPr lang="en-US" sz="1100" dirty="0"/>
-          </a:p>
-        </p:txBody>
-      </p:sp>
-      <p:sp>
-        <p:nvSpPr>
-          <p:cNvPr id="35" name="Shape 33"/>
-          <p:cNvSpPr/>
-          <p:nvPr/>
-        </p:nvSpPr>
-        <p:spPr>
-          <a:xfrm>
-            <a:off x="1874520" y="4096512"/>
-            <a:ext cx="6903720" cy="804672"/>
+              <a:t>oa</a:t>
+            </a:r>
+            <a:endParaRPr lang="en-US" sz="900" dirty="0"/>
+          </a:p>
+        </p:txBody>
+      </p:sp>
+      <p:sp>
+        <p:nvSpPr>
+          <p:cNvPr id="37" name="Shape 35"/>
+          <p:cNvSpPr/>
+          <p:nvPr/>
+        </p:nvSpPr>
+        <p:spPr>
+          <a:xfrm>
+            <a:off x="4331643" y="4169664"/>
+            <a:ext cx="685800" cy="475488"/>
           </a:xfrm>
           <a:prstGeom prst="rect">
             <a:avLst>
-              <a:gd name="adj" fmla="val 6818"/>
+              <a:gd name="adj" fmla="val 7692"/>
             </a:avLst>
           </a:prstGeom>
           <a:solidFill>
-            <a:srgbClr val="FCE7F3"/>
+            <a:srgbClr val="FFFFFF"/>
           </a:solidFill>
           <a:ln w="12700">
             <a:solidFill>
@@ -10649,41 +10598,14 @@
       </p:sp>
       <p:sp>
         <p:nvSpPr>
-          <p:cNvPr id="36" name="Shape 34"/>
-          <p:cNvSpPr/>
-          <p:nvPr/>
-        </p:nvSpPr>
-        <p:spPr>
-          <a:xfrm>
-            <a:off x="2023872" y="4169664"/>
-            <a:ext cx="685800" cy="384048"/>
-          </a:xfrm>
-          <a:prstGeom prst="rect">
-            <a:avLst>
-              <a:gd name="adj" fmla="val 9524"/>
-            </a:avLst>
-          </a:prstGeom>
-          <a:solidFill>
-            <a:srgbClr val="FFFFFF"/>
-          </a:solidFill>
-          <a:ln w="12700">
-            <a:solidFill>
-              <a:srgbClr val="DB2777"/>
-            </a:solidFill>
-            <a:prstDash val="solid"/>
-          </a:ln>
-        </p:spPr>
-      </p:sp>
-      <p:sp>
-        <p:nvSpPr>
-          <p:cNvPr id="37" name="Text 35"/>
-          <p:cNvSpPr/>
-          <p:nvPr/>
-        </p:nvSpPr>
-        <p:spPr>
-          <a:xfrm>
-            <a:off x="2023872" y="4169664"/>
-            <a:ext cx="685800" cy="384048"/>
+          <p:cNvPr id="38" name="Text 36"/>
+          <p:cNvSpPr/>
+          <p:nvPr/>
+        </p:nvSpPr>
+        <p:spPr>
+          <a:xfrm>
+            <a:off x="4331643" y="4169664"/>
+            <a:ext cx="685800" cy="475488"/>
           </a:xfrm>
           <a:prstGeom prst="rect">
             <a:avLst/>
@@ -10707,7 +10629,7 @@
                 <a:ea typeface="Trebuchet MS" pitchFamily="34" charset="-122"/>
                 <a:cs typeface="Trebuchet MS" pitchFamily="34" charset="-120"/>
               </a:rPr>
-              <a:t>t</a:t>
+              <a:t>s</a:t>
             </a:r>
             <a:endParaRPr lang="en-US" sz="900" dirty="0"/>
           </a:p>
@@ -10715,18 +10637,18 @@
       </p:sp>
       <p:sp>
         <p:nvSpPr>
-          <p:cNvPr id="38" name="Shape 36"/>
-          <p:cNvSpPr/>
-          <p:nvPr/>
-        </p:nvSpPr>
-        <p:spPr>
-          <a:xfrm>
-            <a:off x="2831592" y="4169664"/>
-            <a:ext cx="685800" cy="384048"/>
+          <p:cNvPr id="39" name="Shape 37"/>
+          <p:cNvSpPr/>
+          <p:nvPr/>
+        </p:nvSpPr>
+        <p:spPr>
+          <a:xfrm>
+            <a:off x="5370141" y="4169664"/>
+            <a:ext cx="685800" cy="475488"/>
           </a:xfrm>
           <a:prstGeom prst="rect">
             <a:avLst>
-              <a:gd name="adj" fmla="val 9524"/>
+              <a:gd name="adj" fmla="val 7692"/>
             </a:avLst>
           </a:prstGeom>
           <a:solidFill>
@@ -10742,14 +10664,14 @@
       </p:sp>
       <p:sp>
         <p:nvSpPr>
-          <p:cNvPr id="39" name="Text 37"/>
-          <p:cNvSpPr/>
-          <p:nvPr/>
-        </p:nvSpPr>
-        <p:spPr>
-          <a:xfrm>
-            <a:off x="2831592" y="4169664"/>
-            <a:ext cx="685800" cy="384048"/>
+          <p:cNvPr id="40" name="Text 38"/>
+          <p:cNvSpPr/>
+          <p:nvPr/>
+        </p:nvSpPr>
+        <p:spPr>
+          <a:xfrm>
+            <a:off x="5370141" y="4169664"/>
+            <a:ext cx="685800" cy="475488"/>
           </a:xfrm>
           <a:prstGeom prst="rect">
             <a:avLst/>
@@ -10773,7 +10695,7 @@
                 <a:ea typeface="Trebuchet MS" pitchFamily="34" charset="-122"/>
                 <a:cs typeface="Trebuchet MS" pitchFamily="34" charset="-120"/>
               </a:rPr>
-              <a:t>r</a:t>
+              <a:t>t</a:t>
             </a:r>
             <a:endParaRPr lang="en-US" sz="900" dirty="0"/>
           </a:p>
@@ -10781,18 +10703,18 @@
       </p:sp>
       <p:sp>
         <p:nvSpPr>
-          <p:cNvPr id="40" name="Shape 38"/>
-          <p:cNvSpPr/>
-          <p:nvPr/>
-        </p:nvSpPr>
-        <p:spPr>
-          <a:xfrm>
-            <a:off x="3639312" y="4169664"/>
-            <a:ext cx="685800" cy="384048"/>
+          <p:cNvPr id="41" name="Shape 39"/>
+          <p:cNvSpPr/>
+          <p:nvPr/>
+        </p:nvSpPr>
+        <p:spPr>
+          <a:xfrm>
+            <a:off x="6408638" y="4169664"/>
+            <a:ext cx="685800" cy="475488"/>
           </a:xfrm>
           <a:prstGeom prst="rect">
             <a:avLst>
-              <a:gd name="adj" fmla="val 9524"/>
+              <a:gd name="adj" fmla="val 7692"/>
             </a:avLst>
           </a:prstGeom>
           <a:solidFill>
@@ -10808,14 +10730,14 @@
       </p:sp>
       <p:sp>
         <p:nvSpPr>
-          <p:cNvPr id="41" name="Text 39"/>
-          <p:cNvSpPr/>
-          <p:nvPr/>
-        </p:nvSpPr>
-        <p:spPr>
-          <a:xfrm>
-            <a:off x="3639312" y="4169664"/>
-            <a:ext cx="685800" cy="384048"/>
+          <p:cNvPr id="42" name="Text 40"/>
+          <p:cNvSpPr/>
+          <p:nvPr/>
+        </p:nvSpPr>
+        <p:spPr>
+          <a:xfrm>
+            <a:off x="6408638" y="4169664"/>
+            <a:ext cx="685800" cy="475488"/>
           </a:xfrm>
           <a:prstGeom prst="rect">
             <a:avLst/>
@@ -10839,7 +10761,7 @@
                 <a:ea typeface="Trebuchet MS" pitchFamily="34" charset="-122"/>
                 <a:cs typeface="Trebuchet MS" pitchFamily="34" charset="-120"/>
               </a:rPr>
-              <a:t>o</a:t>
+              <a:t>a</a:t>
             </a:r>
             <a:endParaRPr lang="en-US" sz="900" dirty="0"/>
           </a:p>
@@ -10847,18 +10769,18 @@
       </p:sp>
       <p:sp>
         <p:nvSpPr>
-          <p:cNvPr id="42" name="Shape 40"/>
-          <p:cNvSpPr/>
-          <p:nvPr/>
-        </p:nvSpPr>
-        <p:spPr>
-          <a:xfrm>
-            <a:off x="4447032" y="4169664"/>
-            <a:ext cx="685800" cy="384048"/>
+          <p:cNvPr id="43" name="Shape 41"/>
+          <p:cNvSpPr/>
+          <p:nvPr/>
+        </p:nvSpPr>
+        <p:spPr>
+          <a:xfrm>
+            <a:off x="7447135" y="4169664"/>
+            <a:ext cx="685800" cy="475488"/>
           </a:xfrm>
           <a:prstGeom prst="rect">
             <a:avLst>
-              <a:gd name="adj" fmla="val 9524"/>
+              <a:gd name="adj" fmla="val 7692"/>
             </a:avLst>
           </a:prstGeom>
           <a:solidFill>
@@ -10874,317 +10796,14 @@
       </p:sp>
       <p:sp>
         <p:nvSpPr>
-          <p:cNvPr id="43" name="Text 41"/>
-          <p:cNvSpPr/>
-          <p:nvPr/>
-        </p:nvSpPr>
-        <p:spPr>
-          <a:xfrm>
-            <a:off x="4447032" y="4169664"/>
-            <a:ext cx="685800" cy="384048"/>
-          </a:xfrm>
-          <a:prstGeom prst="rect">
-            <a:avLst/>
-          </a:prstGeom>
-          <a:noFill/>
-          <a:ln/>
-        </p:spPr>
-        <p:txBody>
-          <a:bodyPr wrap="square" lIns="0" tIns="0" rIns="0" bIns="0" rtlCol="0" anchor="ctr"/>
-          <a:lstStyle/>
-          <a:p>
-            <a:pPr algn="ctr" indent="0" marL="0">
-              <a:buNone/>
-            </a:pPr>
-            <a:r>
-              <a:rPr lang="en-US" sz="900" b="1" dirty="0">
-                <a:solidFill>
-                  <a:srgbClr val="9D174D"/>
-                </a:solidFill>
-                <a:latin typeface="Trebuchet MS" pitchFamily="34" charset="0"/>
-                <a:ea typeface="Trebuchet MS" pitchFamily="34" charset="-122"/>
-                <a:cs typeface="Trebuchet MS" pitchFamily="34" charset="-120"/>
-              </a:rPr>
-              <a:t>p</a:t>
-            </a:r>
-            <a:endParaRPr lang="en-US" sz="900" dirty="0"/>
-          </a:p>
-        </p:txBody>
-      </p:sp>
-      <p:sp>
-        <p:nvSpPr>
-          <p:cNvPr id="44" name="Shape 42"/>
-          <p:cNvSpPr/>
-          <p:nvPr/>
-        </p:nvSpPr>
-        <p:spPr>
-          <a:xfrm>
-            <a:off x="5254752" y="4169664"/>
-            <a:ext cx="685800" cy="384048"/>
-          </a:xfrm>
-          <a:prstGeom prst="rect">
-            <a:avLst>
-              <a:gd name="adj" fmla="val 9524"/>
-            </a:avLst>
-          </a:prstGeom>
-          <a:solidFill>
-            <a:srgbClr val="FFFFFF"/>
-          </a:solidFill>
-          <a:ln w="12700">
-            <a:solidFill>
-              <a:srgbClr val="DB2777"/>
-            </a:solidFill>
-            <a:prstDash val="solid"/>
-          </a:ln>
-        </p:spPr>
-      </p:sp>
-      <p:sp>
-        <p:nvSpPr>
-          <p:cNvPr id="45" name="Text 43"/>
-          <p:cNvSpPr/>
-          <p:nvPr/>
-        </p:nvSpPr>
-        <p:spPr>
-          <a:xfrm>
-            <a:off x="5254752" y="4169664"/>
-            <a:ext cx="685800" cy="384048"/>
-          </a:xfrm>
-          <a:prstGeom prst="rect">
-            <a:avLst/>
-          </a:prstGeom>
-          <a:noFill/>
-          <a:ln/>
-        </p:spPr>
-        <p:txBody>
-          <a:bodyPr wrap="square" lIns="0" tIns="0" rIns="0" bIns="0" rtlCol="0" anchor="ctr"/>
-          <a:lstStyle/>
-          <a:p>
-            <a:pPr algn="ctr" indent="0" marL="0">
-              <a:buNone/>
-            </a:pPr>
-            <a:r>
-              <a:rPr lang="en-US" sz="900" b="1" dirty="0">
-                <a:solidFill>
-                  <a:srgbClr val="9D174D"/>
-                </a:solidFill>
-                <a:latin typeface="Trebuchet MS" pitchFamily="34" charset="0"/>
-                <a:ea typeface="Trebuchet MS" pitchFamily="34" charset="-122"/>
-                <a:cs typeface="Trebuchet MS" pitchFamily="34" charset="-120"/>
-              </a:rPr>
-              <a:t>i</a:t>
-            </a:r>
-            <a:endParaRPr lang="en-US" sz="900" dirty="0"/>
-          </a:p>
-        </p:txBody>
-      </p:sp>
-      <p:sp>
-        <p:nvSpPr>
-          <p:cNvPr id="46" name="Shape 44"/>
-          <p:cNvSpPr/>
-          <p:nvPr/>
-        </p:nvSpPr>
-        <p:spPr>
-          <a:xfrm>
-            <a:off x="6062472" y="4169664"/>
-            <a:ext cx="685800" cy="384048"/>
-          </a:xfrm>
-          <a:prstGeom prst="rect">
-            <a:avLst>
-              <a:gd name="adj" fmla="val 9524"/>
-            </a:avLst>
-          </a:prstGeom>
-          <a:solidFill>
-            <a:srgbClr val="FFFFFF"/>
-          </a:solidFill>
-          <a:ln w="12700">
-            <a:solidFill>
-              <a:srgbClr val="DB2777"/>
-            </a:solidFill>
-            <a:prstDash val="solid"/>
-          </a:ln>
-        </p:spPr>
-      </p:sp>
-      <p:sp>
-        <p:nvSpPr>
-          <p:cNvPr id="47" name="Text 45"/>
-          <p:cNvSpPr/>
-          <p:nvPr/>
-        </p:nvSpPr>
-        <p:spPr>
-          <a:xfrm>
-            <a:off x="6062472" y="4169664"/>
-            <a:ext cx="685800" cy="384048"/>
-          </a:xfrm>
-          <a:prstGeom prst="rect">
-            <a:avLst/>
-          </a:prstGeom>
-          <a:noFill/>
-          <a:ln/>
-        </p:spPr>
-        <p:txBody>
-          <a:bodyPr wrap="square" lIns="0" tIns="0" rIns="0" bIns="0" rtlCol="0" anchor="ctr"/>
-          <a:lstStyle/>
-          <a:p>
-            <a:pPr algn="ctr" indent="0" marL="0">
-              <a:buNone/>
-            </a:pPr>
-            <a:r>
-              <a:rPr lang="en-US" sz="900" b="1" dirty="0">
-                <a:solidFill>
-                  <a:srgbClr val="9D174D"/>
-                </a:solidFill>
-                <a:latin typeface="Trebuchet MS" pitchFamily="34" charset="0"/>
-                <a:ea typeface="Trebuchet MS" pitchFamily="34" charset="-122"/>
-                <a:cs typeface="Trebuchet MS" pitchFamily="34" charset="-120"/>
-              </a:rPr>
-              <a:t>c</a:t>
-            </a:r>
-            <a:endParaRPr lang="en-US" sz="900" dirty="0"/>
-          </a:p>
-        </p:txBody>
-      </p:sp>
-      <p:sp>
-        <p:nvSpPr>
-          <p:cNvPr id="48" name="Text 46"/>
-          <p:cNvSpPr/>
-          <p:nvPr/>
-        </p:nvSpPr>
-        <p:spPr>
-          <a:xfrm>
-            <a:off x="6062472" y="4572000"/>
-            <a:ext cx="685800" cy="219456"/>
-          </a:xfrm>
-          <a:prstGeom prst="rect">
-            <a:avLst/>
-          </a:prstGeom>
-          <a:noFill/>
-          <a:ln/>
-        </p:spPr>
-        <p:txBody>
-          <a:bodyPr wrap="square" lIns="0" tIns="0" rIns="0" bIns="0" rtlCol="0" anchor="t"/>
-          <a:lstStyle/>
-          <a:p>
-            <a:pPr algn="ctr" indent="0" marL="0">
-              <a:buNone/>
-            </a:pPr>
-            <a:r>
-              <a:rPr lang="en-US" sz="750" i="1" dirty="0">
-                <a:solidFill>
-                  <a:srgbClr val="94A3B8"/>
-                </a:solidFill>
-                <a:latin typeface="Calibri" pitchFamily="34" charset="0"/>
-                <a:ea typeface="Calibri" pitchFamily="34" charset="-122"/>
-                <a:cs typeface="Calibri" pitchFamily="34" charset="-120"/>
-              </a:rPr>
-              <a:t>/k/</a:t>
-            </a:r>
-            <a:endParaRPr lang="en-US" sz="750" dirty="0"/>
-          </a:p>
-        </p:txBody>
-      </p:sp>
-      <p:sp>
-        <p:nvSpPr>
-          <p:cNvPr id="49" name="Shape 47"/>
-          <p:cNvSpPr/>
-          <p:nvPr/>
-        </p:nvSpPr>
-        <p:spPr>
-          <a:xfrm>
-            <a:off x="6870192" y="4169664"/>
-            <a:ext cx="685800" cy="384048"/>
-          </a:xfrm>
-          <a:prstGeom prst="rect">
-            <a:avLst>
-              <a:gd name="adj" fmla="val 9524"/>
-            </a:avLst>
-          </a:prstGeom>
-          <a:solidFill>
-            <a:srgbClr val="FFFFFF"/>
-          </a:solidFill>
-          <a:ln w="12700">
-            <a:solidFill>
-              <a:srgbClr val="DB2777"/>
-            </a:solidFill>
-            <a:prstDash val="solid"/>
-          </a:ln>
-        </p:spPr>
-      </p:sp>
-      <p:sp>
-        <p:nvSpPr>
-          <p:cNvPr id="50" name="Text 48"/>
-          <p:cNvSpPr/>
-          <p:nvPr/>
-        </p:nvSpPr>
-        <p:spPr>
-          <a:xfrm>
-            <a:off x="6870192" y="4169664"/>
-            <a:ext cx="685800" cy="384048"/>
-          </a:xfrm>
-          <a:prstGeom prst="rect">
-            <a:avLst/>
-          </a:prstGeom>
-          <a:noFill/>
-          <a:ln/>
-        </p:spPr>
-        <p:txBody>
-          <a:bodyPr wrap="square" lIns="0" tIns="0" rIns="0" bIns="0" rtlCol="0" anchor="ctr"/>
-          <a:lstStyle/>
-          <a:p>
-            <a:pPr algn="ctr" indent="0" marL="0">
-              <a:buNone/>
-            </a:pPr>
-            <a:r>
-              <a:rPr lang="en-US" sz="900" b="1" dirty="0">
-                <a:solidFill>
-                  <a:srgbClr val="9D174D"/>
-                </a:solidFill>
-                <a:latin typeface="Trebuchet MS" pitchFamily="34" charset="0"/>
-                <a:ea typeface="Trebuchet MS" pitchFamily="34" charset="-122"/>
-                <a:cs typeface="Trebuchet MS" pitchFamily="34" charset="-120"/>
-              </a:rPr>
-              <a:t>a</a:t>
-            </a:r>
-            <a:endParaRPr lang="en-US" sz="900" dirty="0"/>
-          </a:p>
-        </p:txBody>
-      </p:sp>
-      <p:sp>
-        <p:nvSpPr>
-          <p:cNvPr id="51" name="Shape 49"/>
-          <p:cNvSpPr/>
-          <p:nvPr/>
-        </p:nvSpPr>
-        <p:spPr>
-          <a:xfrm>
-            <a:off x="7677912" y="4169664"/>
-            <a:ext cx="685800" cy="384048"/>
-          </a:xfrm>
-          <a:prstGeom prst="rect">
-            <a:avLst>
-              <a:gd name="adj" fmla="val 9524"/>
-            </a:avLst>
-          </a:prstGeom>
-          <a:solidFill>
-            <a:srgbClr val="FFFFFF"/>
-          </a:solidFill>
-          <a:ln w="12700">
-            <a:solidFill>
-              <a:srgbClr val="DB2777"/>
-            </a:solidFill>
-            <a:prstDash val="solid"/>
-          </a:ln>
-        </p:spPr>
-      </p:sp>
-      <p:sp>
-        <p:nvSpPr>
-          <p:cNvPr id="52" name="Text 50"/>
-          <p:cNvSpPr/>
-          <p:nvPr/>
-        </p:nvSpPr>
-        <p:spPr>
-          <a:xfrm>
-            <a:off x="7677912" y="4169664"/>
-            <a:ext cx="685800" cy="384048"/>
+          <p:cNvPr id="44" name="Text 42"/>
+          <p:cNvSpPr/>
+          <p:nvPr/>
+        </p:nvSpPr>
+        <p:spPr>
+          <a:xfrm>
+            <a:off x="7447135" y="4169664"/>
+            <a:ext cx="685800" cy="475488"/>
           </a:xfrm>
           <a:prstGeom prst="rect">
             <a:avLst/>
@@ -11639,7 +11258,7 @@
                 <a:ea typeface="Trebuchet MS" pitchFamily="34" charset="-122"/>
                 <a:cs typeface="Trebuchet MS" pitchFamily="34" charset="-120"/>
               </a:rPr>
-              <a:t>natural</a:t>
+              <a:t>annual</a:t>
             </a:r>
             <a:endParaRPr lang="en-US" sz="2800" dirty="0"/>
           </a:p>
@@ -12466,7 +12085,7 @@
                 <a:ea typeface="Trebuchet MS" pitchFamily="34" charset="-122"/>
                 <a:cs typeface="Trebuchet MS" pitchFamily="34" charset="-120"/>
               </a:rPr>
-              <a:t>natural</a:t>
+              <a:t>annual</a:t>
             </a:r>
             <a:endParaRPr lang="en-US" sz="2800" dirty="0"/>
           </a:p>
@@ -12605,7 +12224,7 @@
                 <a:ea typeface="Trebuchet MS" pitchFamily="34" charset="-122"/>
                 <a:cs typeface="Trebuchet MS" pitchFamily="34" charset="-120"/>
               </a:rPr>
-              <a:t>natur</a:t>
+              <a:t>annu</a:t>
             </a:r>
             <a:endParaRPr lang="en-US" sz="1300" dirty="0"/>
           </a:p>
@@ -12644,7 +12263,7 @@
                 <a:ea typeface="Calibri" pitchFamily="34" charset="-122"/>
                 <a:cs typeface="Calibri" pitchFamily="34" charset="-120"/>
               </a:rPr>
-              <a:t>nature</a:t>
+              <a:t>year</a:t>
             </a:r>
             <a:endParaRPr lang="en-US" sz="850" dirty="0"/>
           </a:p>
@@ -13451,7 +13070,7 @@
                 <a:ea typeface="Trebuchet MS" pitchFamily="34" charset="-122"/>
                 <a:cs typeface="Trebuchet MS" pitchFamily="34" charset="-120"/>
               </a:rPr>
-              <a:t>natural</a:t>
+              <a:t>annual</a:t>
             </a:r>
             <a:endParaRPr lang="en-US" sz="2800" dirty="0"/>
           </a:p>
@@ -13590,7 +13209,7 @@
                 <a:ea typeface="Trebuchet MS" pitchFamily="34" charset="-122"/>
                 <a:cs typeface="Trebuchet MS" pitchFamily="34" charset="-120"/>
               </a:rPr>
-              <a:t>natur</a:t>
+              <a:t>annu</a:t>
             </a:r>
             <a:endParaRPr lang="en-US" sz="1300" dirty="0"/>
           </a:p>
@@ -13629,7 +13248,7 @@
                 <a:ea typeface="Calibri" pitchFamily="34" charset="-122"/>
                 <a:cs typeface="Calibri" pitchFamily="34" charset="-120"/>
               </a:rPr>
-              <a:t>nature</a:t>
+              <a:t>year</a:t>
             </a:r>
             <a:endParaRPr lang="en-US" sz="850" dirty="0"/>
           </a:p>
@@ -13900,7 +13519,7 @@
                 <a:ea typeface="Trebuchet MS" pitchFamily="34" charset="-122"/>
                 <a:cs typeface="Trebuchet MS" pitchFamily="34" charset="-120"/>
               </a:rPr>
-              <a:t>nat</a:t>
+              <a:t>an</a:t>
             </a:r>
             <a:endParaRPr lang="en-US" sz="1400" dirty="0"/>
           </a:p>
@@ -14005,7 +13624,7 @@
                 <a:ea typeface="Trebuchet MS" pitchFamily="34" charset="-122"/>
                 <a:cs typeface="Trebuchet MS" pitchFamily="34" charset="-120"/>
               </a:rPr>
-              <a:t>u</a:t>
+              <a:t>nu</a:t>
             </a:r>
             <a:endParaRPr lang="en-US" sz="1400" dirty="0"/>
           </a:p>
@@ -14110,7 +13729,7 @@
                 <a:ea typeface="Trebuchet MS" pitchFamily="34" charset="-122"/>
                 <a:cs typeface="Trebuchet MS" pitchFamily="34" charset="-120"/>
               </a:rPr>
-              <a:t>ral</a:t>
+              <a:t>al</a:t>
             </a:r>
             <a:endParaRPr lang="en-US" sz="1400" dirty="0"/>
           </a:p>
@@ -14938,7 +14557,7 @@
                 <a:ea typeface="Trebuchet MS" pitchFamily="34" charset="-122"/>
                 <a:cs typeface="Trebuchet MS" pitchFamily="34" charset="-120"/>
               </a:rPr>
-              <a:t>natural</a:t>
+              <a:t>annual</a:t>
             </a:r>
             <a:endParaRPr lang="en-US" sz="2800" dirty="0"/>
           </a:p>
@@ -15077,7 +14696,7 @@
                 <a:ea typeface="Trebuchet MS" pitchFamily="34" charset="-122"/>
                 <a:cs typeface="Trebuchet MS" pitchFamily="34" charset="-120"/>
               </a:rPr>
-              <a:t>natur</a:t>
+              <a:t>annu</a:t>
             </a:r>
             <a:endParaRPr lang="en-US" sz="1300" dirty="0"/>
           </a:p>
@@ -15116,7 +14735,7 @@
                 <a:ea typeface="Calibri" pitchFamily="34" charset="-122"/>
                 <a:cs typeface="Calibri" pitchFamily="34" charset="-120"/>
               </a:rPr>
-              <a:t>nature</a:t>
+              <a:t>year</a:t>
             </a:r>
             <a:endParaRPr lang="en-US" sz="850" dirty="0"/>
           </a:p>
@@ -15387,7 +15006,7 @@
                 <a:ea typeface="Trebuchet MS" pitchFamily="34" charset="-122"/>
                 <a:cs typeface="Trebuchet MS" pitchFamily="34" charset="-120"/>
               </a:rPr>
-              <a:t>nat</a:t>
+              <a:t>an</a:t>
             </a:r>
             <a:endParaRPr lang="en-US" sz="1400" dirty="0"/>
           </a:p>
@@ -15492,7 +15111,7 @@
                 <a:ea typeface="Trebuchet MS" pitchFamily="34" charset="-122"/>
                 <a:cs typeface="Trebuchet MS" pitchFamily="34" charset="-120"/>
               </a:rPr>
-              <a:t>u</a:t>
+              <a:t>nu</a:t>
             </a:r>
             <a:endParaRPr lang="en-US" sz="1400" dirty="0"/>
           </a:p>
@@ -15597,7 +15216,7 @@
                 <a:ea typeface="Trebuchet MS" pitchFamily="34" charset="-122"/>
                 <a:cs typeface="Trebuchet MS" pitchFamily="34" charset="-120"/>
               </a:rPr>
-              <a:t>ral</a:t>
+              <a:t>al</a:t>
             </a:r>
             <a:endParaRPr lang="en-US" sz="1400" dirty="0"/>
           </a:p>
@@ -15704,7 +15323,7 @@
         </p:nvSpPr>
         <p:spPr>
           <a:xfrm>
-            <a:off x="2124837" y="4169664"/>
+            <a:off x="2427732" y="4169664"/>
             <a:ext cx="685800" cy="475488"/>
           </a:xfrm>
           <a:prstGeom prst="rect">
@@ -15731,7 +15350,7 @@
         </p:nvSpPr>
         <p:spPr>
           <a:xfrm>
-            <a:off x="2124837" y="4169664"/>
+            <a:off x="2427732" y="4169664"/>
             <a:ext cx="685800" cy="475488"/>
           </a:xfrm>
           <a:prstGeom prst="rect">
@@ -15756,7 +15375,7 @@
                 <a:ea typeface="Trebuchet MS" pitchFamily="34" charset="-122"/>
                 <a:cs typeface="Trebuchet MS" pitchFamily="34" charset="-120"/>
               </a:rPr>
-              <a:t>n</a:t>
+              <a:t>a</a:t>
             </a:r>
             <a:endParaRPr lang="en-US" sz="900" dirty="0"/>
           </a:p>
@@ -15770,7 +15389,7 @@
         </p:nvSpPr>
         <p:spPr>
           <a:xfrm>
-            <a:off x="3033522" y="4169664"/>
+            <a:off x="3639312" y="4169664"/>
             <a:ext cx="685800" cy="475488"/>
           </a:xfrm>
           <a:prstGeom prst="rect">
@@ -15797,7 +15416,7 @@
         </p:nvSpPr>
         <p:spPr>
           <a:xfrm>
-            <a:off x="3033522" y="4169664"/>
+            <a:off x="3639312" y="4169664"/>
             <a:ext cx="685800" cy="475488"/>
           </a:xfrm>
           <a:prstGeom prst="rect">
@@ -15822,7 +15441,7 @@
                 <a:ea typeface="Trebuchet MS" pitchFamily="34" charset="-122"/>
                 <a:cs typeface="Trebuchet MS" pitchFamily="34" charset="-120"/>
               </a:rPr>
-              <a:t>a</a:t>
+              <a:t>nn</a:t>
             </a:r>
             <a:endParaRPr lang="en-US" sz="900" dirty="0"/>
           </a:p>
@@ -15836,7 +15455,7 @@
         </p:nvSpPr>
         <p:spPr>
           <a:xfrm>
-            <a:off x="3942207" y="4169664"/>
+            <a:off x="4850892" y="4169664"/>
             <a:ext cx="685800" cy="475488"/>
           </a:xfrm>
           <a:prstGeom prst="rect">
@@ -15863,7 +15482,7 @@
         </p:nvSpPr>
         <p:spPr>
           <a:xfrm>
-            <a:off x="3942207" y="4169664"/>
+            <a:off x="4850892" y="4169664"/>
             <a:ext cx="685800" cy="475488"/>
           </a:xfrm>
           <a:prstGeom prst="rect">
@@ -15888,7 +15507,7 @@
                 <a:ea typeface="Trebuchet MS" pitchFamily="34" charset="-122"/>
                 <a:cs typeface="Trebuchet MS" pitchFamily="34" charset="-120"/>
               </a:rPr>
-              <a:t>t</a:t>
+              <a:t>u</a:t>
             </a:r>
             <a:endParaRPr lang="en-US" sz="900" dirty="0"/>
           </a:p>
@@ -15902,7 +15521,7 @@
         </p:nvSpPr>
         <p:spPr>
           <a:xfrm>
-            <a:off x="4850892" y="4169664"/>
+            <a:off x="6062472" y="4169664"/>
             <a:ext cx="685800" cy="475488"/>
           </a:xfrm>
           <a:prstGeom prst="rect">
@@ -15929,7 +15548,7 @@
         </p:nvSpPr>
         <p:spPr>
           <a:xfrm>
-            <a:off x="4850892" y="4169664"/>
+            <a:off x="6062472" y="4169664"/>
             <a:ext cx="685800" cy="475488"/>
           </a:xfrm>
           <a:prstGeom prst="rect">
@@ -15954,7 +15573,7 @@
                 <a:ea typeface="Trebuchet MS" pitchFamily="34" charset="-122"/>
                 <a:cs typeface="Trebuchet MS" pitchFamily="34" charset="-120"/>
               </a:rPr>
-              <a:t>u</a:t>
+              <a:t>a</a:t>
             </a:r>
             <a:endParaRPr lang="en-US" sz="900" dirty="0"/>
           </a:p>
@@ -15968,7 +15587,7 @@
         </p:nvSpPr>
         <p:spPr>
           <a:xfrm>
-            <a:off x="5759577" y="4169664"/>
+            <a:off x="7274052" y="4169664"/>
             <a:ext cx="685800" cy="475488"/>
           </a:xfrm>
           <a:prstGeom prst="rect">
@@ -15995,139 +15614,7 @@
         </p:nvSpPr>
         <p:spPr>
           <a:xfrm>
-            <a:off x="5759577" y="4169664"/>
-            <a:ext cx="685800" cy="475488"/>
-          </a:xfrm>
-          <a:prstGeom prst="rect">
-            <a:avLst/>
-          </a:prstGeom>
-          <a:noFill/>
-          <a:ln/>
-        </p:spPr>
-        <p:txBody>
-          <a:bodyPr wrap="square" lIns="0" tIns="0" rIns="0" bIns="0" rtlCol="0" anchor="ctr"/>
-          <a:lstStyle/>
-          <a:p>
-            <a:pPr algn="ctr" indent="0" marL="0">
-              <a:buNone/>
-            </a:pPr>
-            <a:r>
-              <a:rPr lang="en-US" sz="900" b="1" dirty="0">
-                <a:solidFill>
-                  <a:srgbClr val="9D174D"/>
-                </a:solidFill>
-                <a:latin typeface="Trebuchet MS" pitchFamily="34" charset="0"/>
-                <a:ea typeface="Trebuchet MS" pitchFamily="34" charset="-122"/>
-                <a:cs typeface="Trebuchet MS" pitchFamily="34" charset="-120"/>
-              </a:rPr>
-              <a:t>r</a:t>
-            </a:r>
-            <a:endParaRPr lang="en-US" sz="900" dirty="0"/>
-          </a:p>
-        </p:txBody>
-      </p:sp>
-      <p:sp>
-        <p:nvSpPr>
-          <p:cNvPr id="46" name="Shape 44"/>
-          <p:cNvSpPr/>
-          <p:nvPr/>
-        </p:nvSpPr>
-        <p:spPr>
-          <a:xfrm>
-            <a:off x="6668262" y="4169664"/>
-            <a:ext cx="685800" cy="475488"/>
-          </a:xfrm>
-          <a:prstGeom prst="rect">
-            <a:avLst>
-              <a:gd name="adj" fmla="val 7692"/>
-            </a:avLst>
-          </a:prstGeom>
-          <a:solidFill>
-            <a:srgbClr val="FFFFFF"/>
-          </a:solidFill>
-          <a:ln w="12700">
-            <a:solidFill>
-              <a:srgbClr val="DB2777"/>
-            </a:solidFill>
-            <a:prstDash val="solid"/>
-          </a:ln>
-        </p:spPr>
-      </p:sp>
-      <p:sp>
-        <p:nvSpPr>
-          <p:cNvPr id="47" name="Text 45"/>
-          <p:cNvSpPr/>
-          <p:nvPr/>
-        </p:nvSpPr>
-        <p:spPr>
-          <a:xfrm>
-            <a:off x="6668262" y="4169664"/>
-            <a:ext cx="685800" cy="475488"/>
-          </a:xfrm>
-          <a:prstGeom prst="rect">
-            <a:avLst/>
-          </a:prstGeom>
-          <a:noFill/>
-          <a:ln/>
-        </p:spPr>
-        <p:txBody>
-          <a:bodyPr wrap="square" lIns="0" tIns="0" rIns="0" bIns="0" rtlCol="0" anchor="ctr"/>
-          <a:lstStyle/>
-          <a:p>
-            <a:pPr algn="ctr" indent="0" marL="0">
-              <a:buNone/>
-            </a:pPr>
-            <a:r>
-              <a:rPr lang="en-US" sz="900" b="1" dirty="0">
-                <a:solidFill>
-                  <a:srgbClr val="9D174D"/>
-                </a:solidFill>
-                <a:latin typeface="Trebuchet MS" pitchFamily="34" charset="0"/>
-                <a:ea typeface="Trebuchet MS" pitchFamily="34" charset="-122"/>
-                <a:cs typeface="Trebuchet MS" pitchFamily="34" charset="-120"/>
-              </a:rPr>
-              <a:t>a</a:t>
-            </a:r>
-            <a:endParaRPr lang="en-US" sz="900" dirty="0"/>
-          </a:p>
-        </p:txBody>
-      </p:sp>
-      <p:sp>
-        <p:nvSpPr>
-          <p:cNvPr id="48" name="Shape 46"/>
-          <p:cNvSpPr/>
-          <p:nvPr/>
-        </p:nvSpPr>
-        <p:spPr>
-          <a:xfrm>
-            <a:off x="7576947" y="4169664"/>
-            <a:ext cx="685800" cy="475488"/>
-          </a:xfrm>
-          <a:prstGeom prst="rect">
-            <a:avLst>
-              <a:gd name="adj" fmla="val 7692"/>
-            </a:avLst>
-          </a:prstGeom>
-          <a:solidFill>
-            <a:srgbClr val="FFFFFF"/>
-          </a:solidFill>
-          <a:ln w="12700">
-            <a:solidFill>
-              <a:srgbClr val="DB2777"/>
-            </a:solidFill>
-            <a:prstDash val="solid"/>
-          </a:ln>
-        </p:spPr>
-      </p:sp>
-      <p:sp>
-        <p:nvSpPr>
-          <p:cNvPr id="49" name="Text 47"/>
-          <p:cNvSpPr/>
-          <p:nvPr/>
-        </p:nvSpPr>
-        <p:spPr>
-          <a:xfrm>
-            <a:off x="7576947" y="4169664"/>
+            <a:off x="7274052" y="4169664"/>
             <a:ext cx="685800" cy="475488"/>
           </a:xfrm>
           <a:prstGeom prst="rect">
@@ -17495,7 +16982,7 @@
                 <a:ea typeface="Calibri" pitchFamily="34" charset="-122"/>
                 <a:cs typeface="Calibri" pitchFamily="34" charset="-120"/>
               </a:rPr>
-              <a:t>national</a:t>
+              <a:t>tropical</a:t>
             </a:r>
             <a:pPr algn="l" indent="0" marL="0">
               <a:buNone/>
@@ -17509,7 +16996,7 @@
                 <a:ea typeface="Calibri" pitchFamily="34" charset="-122"/>
                 <a:cs typeface="Calibri" pitchFamily="34" charset="-120"/>
               </a:rPr>
-              <a:t> museum had a </a:t>
+              <a:t> storm was a </a:t>
             </a:r>
             <a:pPr algn="l" indent="0" marL="0">
               <a:buNone/>
@@ -17526,7 +17013,7 @@
                 <a:ea typeface="Calibri" pitchFamily="34" charset="-122"/>
                 <a:cs typeface="Calibri" pitchFamily="34" charset="-120"/>
               </a:rPr>
-              <a:t>magical</a:t>
+              <a:t>natural</a:t>
             </a:r>
             <a:pPr algn="l" indent="0" marL="0">
               <a:buNone/>
@@ -17540,7 +17027,7 @@
                 <a:ea typeface="Calibri" pitchFamily="34" charset="-122"/>
                 <a:cs typeface="Calibri" pitchFamily="34" charset="-120"/>
               </a:rPr>
-              <a:t> display about </a:t>
+              <a:t> event, but the </a:t>
             </a:r>
             <a:pPr algn="l" indent="0" marL="0">
               <a:buNone/>
@@ -17557,7 +17044,7 @@
                 <a:ea typeface="Calibri" pitchFamily="34" charset="-122"/>
                 <a:cs typeface="Calibri" pitchFamily="34" charset="-120"/>
               </a:rPr>
-              <a:t>coastal</a:t>
+              <a:t>structural</a:t>
             </a:r>
             <a:pPr algn="l" indent="0" marL="0">
               <a:buNone/>
@@ -17571,7 +17058,7 @@
                 <a:ea typeface="Calibri" pitchFamily="34" charset="-122"/>
                 <a:cs typeface="Calibri" pitchFamily="34" charset="-120"/>
               </a:rPr>
-              <a:t> Aboriginal life.</a:t>
+              <a:t> damage to the bridge was serious.</a:t>
             </a:r>
             <a:endParaRPr lang="en-US" sz="1800" dirty="0"/>
           </a:p>
@@ -17726,7 +17213,7 @@
                 <a:ea typeface="Trebuchet MS" pitchFamily="34" charset="-122"/>
                 <a:cs typeface="Trebuchet MS" pitchFamily="34" charset="-120"/>
               </a:rPr>
-              <a:t>national</a:t>
+              <a:t>tropical</a:t>
             </a:r>
             <a:endParaRPr lang="en-US" sz="1400" dirty="0"/>
           </a:p>
@@ -17854,7 +17341,7 @@
                 <a:ea typeface="Trebuchet MS" pitchFamily="34" charset="-122"/>
                 <a:cs typeface="Trebuchet MS" pitchFamily="34" charset="-120"/>
               </a:rPr>
-              <a:t>magical</a:t>
+              <a:t>natural</a:t>
             </a:r>
             <a:endParaRPr lang="en-US" sz="1400" dirty="0"/>
           </a:p>
@@ -17982,7 +17469,7 @@
                 <a:ea typeface="Trebuchet MS" pitchFamily="34" charset="-122"/>
                 <a:cs typeface="Trebuchet MS" pitchFamily="34" charset="-120"/>
               </a:rPr>
-              <a:t>coastal</a:t>
+              <a:t>structural</a:t>
             </a:r>
             <a:endParaRPr lang="en-US" sz="1400" dirty="0"/>
           </a:p>
@@ -18452,7 +17939,7 @@
                 <a:ea typeface="Trebuchet MS" pitchFamily="34" charset="-122"/>
                 <a:cs typeface="Trebuchet MS" pitchFamily="34" charset="-120"/>
               </a:rPr>
-              <a:t>national</a:t>
+              <a:t>tropical</a:t>
             </a:r>
             <a:endParaRPr lang="en-US" sz="2800" dirty="0"/>
           </a:p>
@@ -19279,7 +18766,7 @@
                 <a:ea typeface="Trebuchet MS" pitchFamily="34" charset="-122"/>
                 <a:cs typeface="Trebuchet MS" pitchFamily="34" charset="-120"/>
               </a:rPr>
-              <a:t>national</a:t>
+              <a:t>tropical</a:t>
             </a:r>
             <a:endParaRPr lang="en-US" sz="2800" dirty="0"/>
           </a:p>
@@ -19418,7 +18905,7 @@
                 <a:ea typeface="Trebuchet MS" pitchFamily="34" charset="-122"/>
                 <a:cs typeface="Trebuchet MS" pitchFamily="34" charset="-120"/>
               </a:rPr>
-              <a:t>nation</a:t>
+              <a:t>tropic</a:t>
             </a:r>
             <a:endParaRPr lang="en-US" sz="1300" dirty="0"/>
           </a:p>
@@ -19457,7 +18944,7 @@
                 <a:ea typeface="Calibri" pitchFamily="34" charset="-122"/>
                 <a:cs typeface="Calibri" pitchFamily="34" charset="-120"/>
               </a:rPr>
-              <a:t>a country or people</a:t>
+              <a:t>the hot region near the equator</a:t>
             </a:r>
             <a:endParaRPr lang="en-US" sz="850" dirty="0"/>
           </a:p>
@@ -20264,7 +19751,7 @@
                 <a:ea typeface="Trebuchet MS" pitchFamily="34" charset="-122"/>
                 <a:cs typeface="Trebuchet MS" pitchFamily="34" charset="-120"/>
               </a:rPr>
-              <a:t>national</a:t>
+              <a:t>tropical</a:t>
             </a:r>
             <a:endParaRPr lang="en-US" sz="2800" dirty="0"/>
           </a:p>
@@ -20403,7 +19890,7 @@
                 <a:ea typeface="Trebuchet MS" pitchFamily="34" charset="-122"/>
                 <a:cs typeface="Trebuchet MS" pitchFamily="34" charset="-120"/>
               </a:rPr>
-              <a:t>nation</a:t>
+              <a:t>tropic</a:t>
             </a:r>
             <a:endParaRPr lang="en-US" sz="1300" dirty="0"/>
           </a:p>
@@ -20442,7 +19929,7 @@
                 <a:ea typeface="Calibri" pitchFamily="34" charset="-122"/>
                 <a:cs typeface="Calibri" pitchFamily="34" charset="-120"/>
               </a:rPr>
-              <a:t>a country or people</a:t>
+              <a:t>the hot region near the equator</a:t>
             </a:r>
             <a:endParaRPr lang="en-US" sz="850" dirty="0"/>
           </a:p>
@@ -20713,7 +20200,7 @@
                 <a:ea typeface="Trebuchet MS" pitchFamily="34" charset="-122"/>
                 <a:cs typeface="Trebuchet MS" pitchFamily="34" charset="-120"/>
               </a:rPr>
-              <a:t>na</a:t>
+              <a:t>trop</a:t>
             </a:r>
             <a:endParaRPr lang="en-US" sz="1400" dirty="0"/>
           </a:p>
@@ -20818,7 +20305,7 @@
                 <a:ea typeface="Trebuchet MS" pitchFamily="34" charset="-122"/>
                 <a:cs typeface="Trebuchet MS" pitchFamily="34" charset="-120"/>
               </a:rPr>
-              <a:t>tion</a:t>
+              <a:t>i</a:t>
             </a:r>
             <a:endParaRPr lang="en-US" sz="1400" dirty="0"/>
           </a:p>
@@ -20923,7 +20410,7 @@
                 <a:ea typeface="Trebuchet MS" pitchFamily="34" charset="-122"/>
                 <a:cs typeface="Trebuchet MS" pitchFamily="34" charset="-120"/>
               </a:rPr>
-              <a:t>al</a:t>
+              <a:t>cal</a:t>
             </a:r>
             <a:endParaRPr lang="en-US" sz="1400" dirty="0"/>
           </a:p>
@@ -21486,7 +20973,7 @@
                 <a:ea typeface="Trebuchet MS" pitchFamily="34" charset="-122"/>
                 <a:cs typeface="Trebuchet MS" pitchFamily="34" charset="-120"/>
               </a:rPr>
-              <a:t>national</a:t>
+              <a:t>tropical</a:t>
             </a:r>
             <a:endParaRPr lang="en-US" sz="2800" dirty="0"/>
           </a:p>
@@ -21625,7 +21112,7 @@
                 <a:ea typeface="Trebuchet MS" pitchFamily="34" charset="-122"/>
                 <a:cs typeface="Trebuchet MS" pitchFamily="34" charset="-120"/>
               </a:rPr>
-              <a:t>nation</a:t>
+              <a:t>tropic</a:t>
             </a:r>
             <a:endParaRPr lang="en-US" sz="1300" dirty="0"/>
           </a:p>
@@ -21664,7 +21151,7 @@
                 <a:ea typeface="Calibri" pitchFamily="34" charset="-122"/>
                 <a:cs typeface="Calibri" pitchFamily="34" charset="-120"/>
               </a:rPr>
-              <a:t>a country or people</a:t>
+              <a:t>the hot region near the equator</a:t>
             </a:r>
             <a:endParaRPr lang="en-US" sz="850" dirty="0"/>
           </a:p>
@@ -21935,7 +21422,7 @@
                 <a:ea typeface="Trebuchet MS" pitchFamily="34" charset="-122"/>
                 <a:cs typeface="Trebuchet MS" pitchFamily="34" charset="-120"/>
               </a:rPr>
-              <a:t>na</a:t>
+              <a:t>trop</a:t>
             </a:r>
             <a:endParaRPr lang="en-US" sz="1400" dirty="0"/>
           </a:p>
@@ -22040,7 +21527,7 @@
                 <a:ea typeface="Trebuchet MS" pitchFamily="34" charset="-122"/>
                 <a:cs typeface="Trebuchet MS" pitchFamily="34" charset="-120"/>
               </a:rPr>
-              <a:t>tion</a:t>
+              <a:t>i</a:t>
             </a:r>
             <a:endParaRPr lang="en-US" sz="1400" dirty="0"/>
           </a:p>
@@ -22145,7 +21632,7 @@
                 <a:ea typeface="Trebuchet MS" pitchFamily="34" charset="-122"/>
                 <a:cs typeface="Trebuchet MS" pitchFamily="34" charset="-120"/>
               </a:rPr>
-              <a:t>al</a:t>
+              <a:t>cal</a:t>
             </a:r>
             <a:endParaRPr lang="en-US" sz="1400" dirty="0"/>
           </a:p>
@@ -22252,7 +21739,7 @@
         </p:nvSpPr>
         <p:spPr>
           <a:xfrm>
-            <a:off x="2124837" y="4169664"/>
+            <a:off x="2023872" y="4169664"/>
             <a:ext cx="685800" cy="384048"/>
           </a:xfrm>
           <a:prstGeom prst="rect">
@@ -22279,7 +21766,7 @@
         </p:nvSpPr>
         <p:spPr>
           <a:xfrm>
-            <a:off x="2124837" y="4169664"/>
+            <a:off x="2023872" y="4169664"/>
             <a:ext cx="685800" cy="384048"/>
           </a:xfrm>
           <a:prstGeom prst="rect">
@@ -22304,7 +21791,7 @@
                 <a:ea typeface="Trebuchet MS" pitchFamily="34" charset="-122"/>
                 <a:cs typeface="Trebuchet MS" pitchFamily="34" charset="-120"/>
               </a:rPr>
-              <a:t>n</a:t>
+              <a:t>t</a:t>
             </a:r>
             <a:endParaRPr lang="en-US" sz="900" dirty="0"/>
           </a:p>
@@ -22318,7 +21805,7 @@
         </p:nvSpPr>
         <p:spPr>
           <a:xfrm>
-            <a:off x="3033522" y="4169664"/>
+            <a:off x="2831592" y="4169664"/>
             <a:ext cx="685800" cy="384048"/>
           </a:xfrm>
           <a:prstGeom prst="rect">
@@ -22345,7 +21832,7 @@
         </p:nvSpPr>
         <p:spPr>
           <a:xfrm>
-            <a:off x="3033522" y="4169664"/>
+            <a:off x="2831592" y="4169664"/>
             <a:ext cx="685800" cy="384048"/>
           </a:xfrm>
           <a:prstGeom prst="rect">
@@ -22370,7 +21857,7 @@
                 <a:ea typeface="Trebuchet MS" pitchFamily="34" charset="-122"/>
                 <a:cs typeface="Trebuchet MS" pitchFamily="34" charset="-120"/>
               </a:rPr>
-              <a:t>a</a:t>
+              <a:t>r</a:t>
             </a:r>
             <a:endParaRPr lang="en-US" sz="900" dirty="0"/>
           </a:p>
@@ -22384,7 +21871,7 @@
         </p:nvSpPr>
         <p:spPr>
           <a:xfrm>
-            <a:off x="3942207" y="4169664"/>
+            <a:off x="3639312" y="4169664"/>
             <a:ext cx="685800" cy="384048"/>
           </a:xfrm>
           <a:prstGeom prst="rect">
@@ -22411,7 +21898,7 @@
         </p:nvSpPr>
         <p:spPr>
           <a:xfrm>
-            <a:off x="3942207" y="4169664"/>
+            <a:off x="3639312" y="4169664"/>
             <a:ext cx="685800" cy="384048"/>
           </a:xfrm>
           <a:prstGeom prst="rect">
@@ -22436,7 +21923,7 @@
                 <a:ea typeface="Trebuchet MS" pitchFamily="34" charset="-122"/>
                 <a:cs typeface="Trebuchet MS" pitchFamily="34" charset="-120"/>
               </a:rPr>
-              <a:t>t</a:t>
+              <a:t>o</a:t>
             </a:r>
             <a:endParaRPr lang="en-US" sz="900" dirty="0"/>
           </a:p>
@@ -22444,13 +21931,211 @@
       </p:sp>
       <p:sp>
         <p:nvSpPr>
-          <p:cNvPr id="42" name="Text 40"/>
-          <p:cNvSpPr/>
-          <p:nvPr/>
-        </p:nvSpPr>
-        <p:spPr>
-          <a:xfrm>
-            <a:off x="3942207" y="4572000"/>
+          <p:cNvPr id="42" name="Shape 40"/>
+          <p:cNvSpPr/>
+          <p:nvPr/>
+        </p:nvSpPr>
+        <p:spPr>
+          <a:xfrm>
+            <a:off x="4447032" y="4169664"/>
+            <a:ext cx="685800" cy="384048"/>
+          </a:xfrm>
+          <a:prstGeom prst="rect">
+            <a:avLst>
+              <a:gd name="adj" fmla="val 9524"/>
+            </a:avLst>
+          </a:prstGeom>
+          <a:solidFill>
+            <a:srgbClr val="FFFFFF"/>
+          </a:solidFill>
+          <a:ln w="12700">
+            <a:solidFill>
+              <a:srgbClr val="DB2777"/>
+            </a:solidFill>
+            <a:prstDash val="solid"/>
+          </a:ln>
+        </p:spPr>
+      </p:sp>
+      <p:sp>
+        <p:nvSpPr>
+          <p:cNvPr id="43" name="Text 41"/>
+          <p:cNvSpPr/>
+          <p:nvPr/>
+        </p:nvSpPr>
+        <p:spPr>
+          <a:xfrm>
+            <a:off x="4447032" y="4169664"/>
+            <a:ext cx="685800" cy="384048"/>
+          </a:xfrm>
+          <a:prstGeom prst="rect">
+            <a:avLst/>
+          </a:prstGeom>
+          <a:noFill/>
+          <a:ln/>
+        </p:spPr>
+        <p:txBody>
+          <a:bodyPr wrap="square" lIns="0" tIns="0" rIns="0" bIns="0" rtlCol="0" anchor="ctr"/>
+          <a:lstStyle/>
+          <a:p>
+            <a:pPr algn="ctr" indent="0" marL="0">
+              <a:buNone/>
+            </a:pPr>
+            <a:r>
+              <a:rPr lang="en-US" sz="900" b="1" dirty="0">
+                <a:solidFill>
+                  <a:srgbClr val="9D174D"/>
+                </a:solidFill>
+                <a:latin typeface="Trebuchet MS" pitchFamily="34" charset="0"/>
+                <a:ea typeface="Trebuchet MS" pitchFamily="34" charset="-122"/>
+                <a:cs typeface="Trebuchet MS" pitchFamily="34" charset="-120"/>
+              </a:rPr>
+              <a:t>p</a:t>
+            </a:r>
+            <a:endParaRPr lang="en-US" sz="900" dirty="0"/>
+          </a:p>
+        </p:txBody>
+      </p:sp>
+      <p:sp>
+        <p:nvSpPr>
+          <p:cNvPr id="44" name="Shape 42"/>
+          <p:cNvSpPr/>
+          <p:nvPr/>
+        </p:nvSpPr>
+        <p:spPr>
+          <a:xfrm>
+            <a:off x="5254752" y="4169664"/>
+            <a:ext cx="685800" cy="384048"/>
+          </a:xfrm>
+          <a:prstGeom prst="rect">
+            <a:avLst>
+              <a:gd name="adj" fmla="val 9524"/>
+            </a:avLst>
+          </a:prstGeom>
+          <a:solidFill>
+            <a:srgbClr val="FFFFFF"/>
+          </a:solidFill>
+          <a:ln w="12700">
+            <a:solidFill>
+              <a:srgbClr val="DB2777"/>
+            </a:solidFill>
+            <a:prstDash val="solid"/>
+          </a:ln>
+        </p:spPr>
+      </p:sp>
+      <p:sp>
+        <p:nvSpPr>
+          <p:cNvPr id="45" name="Text 43"/>
+          <p:cNvSpPr/>
+          <p:nvPr/>
+        </p:nvSpPr>
+        <p:spPr>
+          <a:xfrm>
+            <a:off x="5254752" y="4169664"/>
+            <a:ext cx="685800" cy="384048"/>
+          </a:xfrm>
+          <a:prstGeom prst="rect">
+            <a:avLst/>
+          </a:prstGeom>
+          <a:noFill/>
+          <a:ln/>
+        </p:spPr>
+        <p:txBody>
+          <a:bodyPr wrap="square" lIns="0" tIns="0" rIns="0" bIns="0" rtlCol="0" anchor="ctr"/>
+          <a:lstStyle/>
+          <a:p>
+            <a:pPr algn="ctr" indent="0" marL="0">
+              <a:buNone/>
+            </a:pPr>
+            <a:r>
+              <a:rPr lang="en-US" sz="900" b="1" dirty="0">
+                <a:solidFill>
+                  <a:srgbClr val="9D174D"/>
+                </a:solidFill>
+                <a:latin typeface="Trebuchet MS" pitchFamily="34" charset="0"/>
+                <a:ea typeface="Trebuchet MS" pitchFamily="34" charset="-122"/>
+                <a:cs typeface="Trebuchet MS" pitchFamily="34" charset="-120"/>
+              </a:rPr>
+              <a:t>i</a:t>
+            </a:r>
+            <a:endParaRPr lang="en-US" sz="900" dirty="0"/>
+          </a:p>
+        </p:txBody>
+      </p:sp>
+      <p:sp>
+        <p:nvSpPr>
+          <p:cNvPr id="46" name="Shape 44"/>
+          <p:cNvSpPr/>
+          <p:nvPr/>
+        </p:nvSpPr>
+        <p:spPr>
+          <a:xfrm>
+            <a:off x="6062472" y="4169664"/>
+            <a:ext cx="685800" cy="384048"/>
+          </a:xfrm>
+          <a:prstGeom prst="rect">
+            <a:avLst>
+              <a:gd name="adj" fmla="val 9524"/>
+            </a:avLst>
+          </a:prstGeom>
+          <a:solidFill>
+            <a:srgbClr val="FFFFFF"/>
+          </a:solidFill>
+          <a:ln w="12700">
+            <a:solidFill>
+              <a:srgbClr val="DB2777"/>
+            </a:solidFill>
+            <a:prstDash val="solid"/>
+          </a:ln>
+        </p:spPr>
+      </p:sp>
+      <p:sp>
+        <p:nvSpPr>
+          <p:cNvPr id="47" name="Text 45"/>
+          <p:cNvSpPr/>
+          <p:nvPr/>
+        </p:nvSpPr>
+        <p:spPr>
+          <a:xfrm>
+            <a:off x="6062472" y="4169664"/>
+            <a:ext cx="685800" cy="384048"/>
+          </a:xfrm>
+          <a:prstGeom prst="rect">
+            <a:avLst/>
+          </a:prstGeom>
+          <a:noFill/>
+          <a:ln/>
+        </p:spPr>
+        <p:txBody>
+          <a:bodyPr wrap="square" lIns="0" tIns="0" rIns="0" bIns="0" rtlCol="0" anchor="ctr"/>
+          <a:lstStyle/>
+          <a:p>
+            <a:pPr algn="ctr" indent="0" marL="0">
+              <a:buNone/>
+            </a:pPr>
+            <a:r>
+              <a:rPr lang="en-US" sz="900" b="1" dirty="0">
+                <a:solidFill>
+                  <a:srgbClr val="9D174D"/>
+                </a:solidFill>
+                <a:latin typeface="Trebuchet MS" pitchFamily="34" charset="0"/>
+                <a:ea typeface="Trebuchet MS" pitchFamily="34" charset="-122"/>
+                <a:cs typeface="Trebuchet MS" pitchFamily="34" charset="-120"/>
+              </a:rPr>
+              <a:t>c</a:t>
+            </a:r>
+            <a:endParaRPr lang="en-US" sz="900" dirty="0"/>
+          </a:p>
+        </p:txBody>
+      </p:sp>
+      <p:sp>
+        <p:nvSpPr>
+          <p:cNvPr id="48" name="Text 46"/>
+          <p:cNvSpPr/>
+          <p:nvPr/>
+        </p:nvSpPr>
+        <p:spPr>
+          <a:xfrm>
+            <a:off x="6062472" y="4572000"/>
             <a:ext cx="685800" cy="219456"/>
           </a:xfrm>
           <a:prstGeom prst="rect">
@@ -22475,7 +22160,7 @@
                 <a:ea typeface="Calibri" pitchFamily="34" charset="-122"/>
                 <a:cs typeface="Calibri" pitchFamily="34" charset="-120"/>
               </a:rPr>
-              <a:t>/sh/</a:t>
+              <a:t>/k/</a:t>
             </a:r>
             <a:endParaRPr lang="en-US" sz="750" dirty="0"/>
           </a:p>
@@ -22483,13 +22168,13 @@
       </p:sp>
       <p:sp>
         <p:nvSpPr>
-          <p:cNvPr id="43" name="Shape 41"/>
-          <p:cNvSpPr/>
-          <p:nvPr/>
-        </p:nvSpPr>
-        <p:spPr>
-          <a:xfrm>
-            <a:off x="4850892" y="4169664"/>
+          <p:cNvPr id="49" name="Shape 47"/>
+          <p:cNvSpPr/>
+          <p:nvPr/>
+        </p:nvSpPr>
+        <p:spPr>
+          <a:xfrm>
+            <a:off x="6870192" y="4169664"/>
             <a:ext cx="685800" cy="384048"/>
           </a:xfrm>
           <a:prstGeom prst="rect">
@@ -22510,13 +22195,13 @@
       </p:sp>
       <p:sp>
         <p:nvSpPr>
-          <p:cNvPr id="44" name="Text 42"/>
-          <p:cNvSpPr/>
-          <p:nvPr/>
-        </p:nvSpPr>
-        <p:spPr>
-          <a:xfrm>
-            <a:off x="4850892" y="4169664"/>
+          <p:cNvPr id="50" name="Text 48"/>
+          <p:cNvSpPr/>
+          <p:nvPr/>
+        </p:nvSpPr>
+        <p:spPr>
+          <a:xfrm>
+            <a:off x="6870192" y="4169664"/>
             <a:ext cx="685800" cy="384048"/>
           </a:xfrm>
           <a:prstGeom prst="rect">
@@ -22541,7 +22226,7 @@
                 <a:ea typeface="Trebuchet MS" pitchFamily="34" charset="-122"/>
                 <a:cs typeface="Trebuchet MS" pitchFamily="34" charset="-120"/>
               </a:rPr>
-              <a:t>io</a:t>
+              <a:t>a</a:t>
             </a:r>
             <a:endParaRPr lang="en-US" sz="900" dirty="0"/>
           </a:p>
@@ -22549,13 +22234,13 @@
       </p:sp>
       <p:sp>
         <p:nvSpPr>
-          <p:cNvPr id="45" name="Shape 43"/>
-          <p:cNvSpPr/>
-          <p:nvPr/>
-        </p:nvSpPr>
-        <p:spPr>
-          <a:xfrm>
-            <a:off x="5759577" y="4169664"/>
+          <p:cNvPr id="51" name="Shape 49"/>
+          <p:cNvSpPr/>
+          <p:nvPr/>
+        </p:nvSpPr>
+        <p:spPr>
+          <a:xfrm>
+            <a:off x="7677912" y="4169664"/>
             <a:ext cx="685800" cy="384048"/>
           </a:xfrm>
           <a:prstGeom prst="rect">
@@ -22576,145 +22261,13 @@
       </p:sp>
       <p:sp>
         <p:nvSpPr>
-          <p:cNvPr id="46" name="Text 44"/>
-          <p:cNvSpPr/>
-          <p:nvPr/>
-        </p:nvSpPr>
-        <p:spPr>
-          <a:xfrm>
-            <a:off x="5759577" y="4169664"/>
-            <a:ext cx="685800" cy="384048"/>
-          </a:xfrm>
-          <a:prstGeom prst="rect">
-            <a:avLst/>
-          </a:prstGeom>
-          <a:noFill/>
-          <a:ln/>
-        </p:spPr>
-        <p:txBody>
-          <a:bodyPr wrap="square" lIns="0" tIns="0" rIns="0" bIns="0" rtlCol="0" anchor="ctr"/>
-          <a:lstStyle/>
-          <a:p>
-            <a:pPr algn="ctr" indent="0" marL="0">
-              <a:buNone/>
-            </a:pPr>
-            <a:r>
-              <a:rPr lang="en-US" sz="900" b="1" dirty="0">
-                <a:solidFill>
-                  <a:srgbClr val="9D174D"/>
-                </a:solidFill>
-                <a:latin typeface="Trebuchet MS" pitchFamily="34" charset="0"/>
-                <a:ea typeface="Trebuchet MS" pitchFamily="34" charset="-122"/>
-                <a:cs typeface="Trebuchet MS" pitchFamily="34" charset="-120"/>
-              </a:rPr>
-              <a:t>n</a:t>
-            </a:r>
-            <a:endParaRPr lang="en-US" sz="900" dirty="0"/>
-          </a:p>
-        </p:txBody>
-      </p:sp>
-      <p:sp>
-        <p:nvSpPr>
-          <p:cNvPr id="47" name="Shape 45"/>
-          <p:cNvSpPr/>
-          <p:nvPr/>
-        </p:nvSpPr>
-        <p:spPr>
-          <a:xfrm>
-            <a:off x="6668262" y="4169664"/>
-            <a:ext cx="685800" cy="384048"/>
-          </a:xfrm>
-          <a:prstGeom prst="rect">
-            <a:avLst>
-              <a:gd name="adj" fmla="val 9524"/>
-            </a:avLst>
-          </a:prstGeom>
-          <a:solidFill>
-            <a:srgbClr val="FFFFFF"/>
-          </a:solidFill>
-          <a:ln w="12700">
-            <a:solidFill>
-              <a:srgbClr val="DB2777"/>
-            </a:solidFill>
-            <a:prstDash val="solid"/>
-          </a:ln>
-        </p:spPr>
-      </p:sp>
-      <p:sp>
-        <p:nvSpPr>
-          <p:cNvPr id="48" name="Text 46"/>
-          <p:cNvSpPr/>
-          <p:nvPr/>
-        </p:nvSpPr>
-        <p:spPr>
-          <a:xfrm>
-            <a:off x="6668262" y="4169664"/>
-            <a:ext cx="685800" cy="384048"/>
-          </a:xfrm>
-          <a:prstGeom prst="rect">
-            <a:avLst/>
-          </a:prstGeom>
-          <a:noFill/>
-          <a:ln/>
-        </p:spPr>
-        <p:txBody>
-          <a:bodyPr wrap="square" lIns="0" tIns="0" rIns="0" bIns="0" rtlCol="0" anchor="ctr"/>
-          <a:lstStyle/>
-          <a:p>
-            <a:pPr algn="ctr" indent="0" marL="0">
-              <a:buNone/>
-            </a:pPr>
-            <a:r>
-              <a:rPr lang="en-US" sz="900" b="1" dirty="0">
-                <a:solidFill>
-                  <a:srgbClr val="9D174D"/>
-                </a:solidFill>
-                <a:latin typeface="Trebuchet MS" pitchFamily="34" charset="0"/>
-                <a:ea typeface="Trebuchet MS" pitchFamily="34" charset="-122"/>
-                <a:cs typeface="Trebuchet MS" pitchFamily="34" charset="-120"/>
-              </a:rPr>
-              <a:t>a</a:t>
-            </a:r>
-            <a:endParaRPr lang="en-US" sz="900" dirty="0"/>
-          </a:p>
-        </p:txBody>
-      </p:sp>
-      <p:sp>
-        <p:nvSpPr>
-          <p:cNvPr id="49" name="Shape 47"/>
-          <p:cNvSpPr/>
-          <p:nvPr/>
-        </p:nvSpPr>
-        <p:spPr>
-          <a:xfrm>
-            <a:off x="7576947" y="4169664"/>
-            <a:ext cx="685800" cy="384048"/>
-          </a:xfrm>
-          <a:prstGeom prst="rect">
-            <a:avLst>
-              <a:gd name="adj" fmla="val 9524"/>
-            </a:avLst>
-          </a:prstGeom>
-          <a:solidFill>
-            <a:srgbClr val="FFFFFF"/>
-          </a:solidFill>
-          <a:ln w="12700">
-            <a:solidFill>
-              <a:srgbClr val="DB2777"/>
-            </a:solidFill>
-            <a:prstDash val="solid"/>
-          </a:ln>
-        </p:spPr>
-      </p:sp>
-      <p:sp>
-        <p:nvSpPr>
-          <p:cNvPr id="50" name="Text 48"/>
-          <p:cNvSpPr/>
-          <p:nvPr/>
-        </p:nvSpPr>
-        <p:spPr>
-          <a:xfrm>
-            <a:off x="7576947" y="4169664"/>
+          <p:cNvPr id="52" name="Text 50"/>
+          <p:cNvSpPr/>
+          <p:nvPr/>
+        </p:nvSpPr>
+        <p:spPr>
+          <a:xfrm>
+            <a:off x="7677912" y="4169664"/>
             <a:ext cx="685800" cy="384048"/>
           </a:xfrm>
           <a:prstGeom prst="rect">
@@ -23170,7 +22723,7 @@
                 <a:ea typeface="Trebuchet MS" pitchFamily="34" charset="-122"/>
                 <a:cs typeface="Trebuchet MS" pitchFamily="34" charset="-120"/>
               </a:rPr>
-              <a:t>magical</a:t>
+              <a:t>natural</a:t>
             </a:r>
             <a:endParaRPr lang="en-US" sz="2800" dirty="0"/>
           </a:p>
@@ -23997,7 +23550,7 @@
                 <a:ea typeface="Trebuchet MS" pitchFamily="34" charset="-122"/>
                 <a:cs typeface="Trebuchet MS" pitchFamily="34" charset="-120"/>
               </a:rPr>
-              <a:t>magical</a:t>
+              <a:t>natural</a:t>
             </a:r>
             <a:endParaRPr lang="en-US" sz="2800" dirty="0"/>
           </a:p>
@@ -24136,7 +23689,7 @@
                 <a:ea typeface="Trebuchet MS" pitchFamily="34" charset="-122"/>
                 <a:cs typeface="Trebuchet MS" pitchFamily="34" charset="-120"/>
               </a:rPr>
-              <a:t>magic</a:t>
+              <a:t>natur</a:t>
             </a:r>
             <a:endParaRPr lang="en-US" sz="1300" dirty="0"/>
           </a:p>
@@ -24175,7 +23728,7 @@
                 <a:ea typeface="Calibri" pitchFamily="34" charset="-122"/>
                 <a:cs typeface="Calibri" pitchFamily="34" charset="-120"/>
               </a:rPr>
-              <a:t>magic or wonder</a:t>
+              <a:t>nature, the world around us</a:t>
             </a:r>
             <a:endParaRPr lang="en-US" sz="850" dirty="0"/>
           </a:p>
@@ -25701,7 +25254,7 @@
                 <a:ea typeface="Trebuchet MS" pitchFamily="34" charset="-122"/>
                 <a:cs typeface="Trebuchet MS" pitchFamily="34" charset="-120"/>
               </a:rPr>
-              <a:t>magical</a:t>
+              <a:t>natural</a:t>
             </a:r>
             <a:endParaRPr lang="en-US" sz="2800" dirty="0"/>
           </a:p>
@@ -25840,7 +25393,7 @@
                 <a:ea typeface="Trebuchet MS" pitchFamily="34" charset="-122"/>
                 <a:cs typeface="Trebuchet MS" pitchFamily="34" charset="-120"/>
               </a:rPr>
-              <a:t>magic</a:t>
+              <a:t>natur</a:t>
             </a:r>
             <a:endParaRPr lang="en-US" sz="1300" dirty="0"/>
           </a:p>
@@ -25879,7 +25432,7 @@
                 <a:ea typeface="Calibri" pitchFamily="34" charset="-122"/>
                 <a:cs typeface="Calibri" pitchFamily="34" charset="-120"/>
               </a:rPr>
-              <a:t>magic or wonder</a:t>
+              <a:t>nature, the world around us</a:t>
             </a:r>
             <a:endParaRPr lang="en-US" sz="850" dirty="0"/>
           </a:p>
@@ -26150,7 +25703,7 @@
                 <a:ea typeface="Trebuchet MS" pitchFamily="34" charset="-122"/>
                 <a:cs typeface="Trebuchet MS" pitchFamily="34" charset="-120"/>
               </a:rPr>
-              <a:t>mag</a:t>
+              <a:t>nat</a:t>
             </a:r>
             <a:endParaRPr lang="en-US" sz="1400" dirty="0"/>
           </a:p>
@@ -26255,7 +25808,7 @@
                 <a:ea typeface="Trebuchet MS" pitchFamily="34" charset="-122"/>
                 <a:cs typeface="Trebuchet MS" pitchFamily="34" charset="-120"/>
               </a:rPr>
-              <a:t>i</a:t>
+              <a:t>u</a:t>
             </a:r>
             <a:endParaRPr lang="en-US" sz="1400" dirty="0"/>
           </a:p>
@@ -26360,7 +25913,7 @@
                 <a:ea typeface="Trebuchet MS" pitchFamily="34" charset="-122"/>
                 <a:cs typeface="Trebuchet MS" pitchFamily="34" charset="-120"/>
               </a:rPr>
-              <a:t>cal</a:t>
+              <a:t>ral</a:t>
             </a:r>
             <a:endParaRPr lang="en-US" sz="1400" dirty="0"/>
           </a:p>
@@ -26923,7 +26476,7 @@
                 <a:ea typeface="Trebuchet MS" pitchFamily="34" charset="-122"/>
                 <a:cs typeface="Trebuchet MS" pitchFamily="34" charset="-120"/>
               </a:rPr>
-              <a:t>magical</a:t>
+              <a:t>natural</a:t>
             </a:r>
             <a:endParaRPr lang="en-US" sz="2800" dirty="0"/>
           </a:p>
@@ -27062,7 +26615,7 @@
                 <a:ea typeface="Trebuchet MS" pitchFamily="34" charset="-122"/>
                 <a:cs typeface="Trebuchet MS" pitchFamily="34" charset="-120"/>
               </a:rPr>
-              <a:t>magic</a:t>
+              <a:t>natur</a:t>
             </a:r>
             <a:endParaRPr lang="en-US" sz="1300" dirty="0"/>
           </a:p>
@@ -27101,7 +26654,7 @@
                 <a:ea typeface="Calibri" pitchFamily="34" charset="-122"/>
                 <a:cs typeface="Calibri" pitchFamily="34" charset="-120"/>
               </a:rPr>
-              <a:t>magic or wonder</a:t>
+              <a:t>nature, the world around us</a:t>
             </a:r>
             <a:endParaRPr lang="en-US" sz="850" dirty="0"/>
           </a:p>
@@ -27372,7 +26925,7 @@
                 <a:ea typeface="Trebuchet MS" pitchFamily="34" charset="-122"/>
                 <a:cs typeface="Trebuchet MS" pitchFamily="34" charset="-120"/>
               </a:rPr>
-              <a:t>mag</a:t>
+              <a:t>nat</a:t>
             </a:r>
             <a:endParaRPr lang="en-US" sz="1400" dirty="0"/>
           </a:p>
@@ -27477,7 +27030,7 @@
                 <a:ea typeface="Trebuchet MS" pitchFamily="34" charset="-122"/>
                 <a:cs typeface="Trebuchet MS" pitchFamily="34" charset="-120"/>
               </a:rPr>
-              <a:t>i</a:t>
+              <a:t>u</a:t>
             </a:r>
             <a:endParaRPr lang="en-US" sz="1400" dirty="0"/>
           </a:p>
@@ -27582,7 +27135,7 @@
                 <a:ea typeface="Trebuchet MS" pitchFamily="34" charset="-122"/>
                 <a:cs typeface="Trebuchet MS" pitchFamily="34" charset="-120"/>
               </a:rPr>
-              <a:t>cal</a:t>
+              <a:t>ral</a:t>
             </a:r>
             <a:endParaRPr lang="en-US" sz="1400" dirty="0"/>
           </a:p>
@@ -27663,11 +27216,11 @@
         <p:spPr>
           <a:xfrm>
             <a:off x="1874520" y="4096512"/>
-            <a:ext cx="6903720" cy="804672"/>
+            <a:ext cx="6903720" cy="658368"/>
           </a:xfrm>
           <a:prstGeom prst="rect">
             <a:avLst>
-              <a:gd name="adj" fmla="val 6818"/>
+              <a:gd name="adj" fmla="val 8333"/>
             </a:avLst>
           </a:prstGeom>
           <a:solidFill>
@@ -27690,11 +27243,11 @@
         <p:spPr>
           <a:xfrm>
             <a:off x="2124837" y="4169664"/>
-            <a:ext cx="685800" cy="384048"/>
+            <a:ext cx="685800" cy="475488"/>
           </a:xfrm>
           <a:prstGeom prst="rect">
             <a:avLst>
-              <a:gd name="adj" fmla="val 9524"/>
+              <a:gd name="adj" fmla="val 7692"/>
             </a:avLst>
           </a:prstGeom>
           <a:solidFill>
@@ -27717,7 +27270,7 @@
         <p:spPr>
           <a:xfrm>
             <a:off x="2124837" y="4169664"/>
-            <a:ext cx="685800" cy="384048"/>
+            <a:ext cx="685800" cy="475488"/>
           </a:xfrm>
           <a:prstGeom prst="rect">
             <a:avLst/>
@@ -27741,7 +27294,7 @@
                 <a:ea typeface="Trebuchet MS" pitchFamily="34" charset="-122"/>
                 <a:cs typeface="Trebuchet MS" pitchFamily="34" charset="-120"/>
               </a:rPr>
-              <a:t>m</a:t>
+              <a:t>n</a:t>
             </a:r>
             <a:endParaRPr lang="en-US" sz="900" dirty="0"/>
           </a:p>
@@ -27756,11 +27309,11 @@
         <p:spPr>
           <a:xfrm>
             <a:off x="3033522" y="4169664"/>
-            <a:ext cx="685800" cy="384048"/>
+            <a:ext cx="685800" cy="475488"/>
           </a:xfrm>
           <a:prstGeom prst="rect">
             <a:avLst>
-              <a:gd name="adj" fmla="val 9524"/>
+              <a:gd name="adj" fmla="val 7692"/>
             </a:avLst>
           </a:prstGeom>
           <a:solidFill>
@@ -27783,7 +27336,7 @@
         <p:spPr>
           <a:xfrm>
             <a:off x="3033522" y="4169664"/>
-            <a:ext cx="685800" cy="384048"/>
+            <a:ext cx="685800" cy="475488"/>
           </a:xfrm>
           <a:prstGeom prst="rect">
             <a:avLst/>
@@ -27822,11 +27375,11 @@
         <p:spPr>
           <a:xfrm>
             <a:off x="3942207" y="4169664"/>
-            <a:ext cx="685800" cy="384048"/>
+            <a:ext cx="685800" cy="475488"/>
           </a:xfrm>
           <a:prstGeom prst="rect">
             <a:avLst>
-              <a:gd name="adj" fmla="val 9524"/>
+              <a:gd name="adj" fmla="val 7692"/>
             </a:avLst>
           </a:prstGeom>
           <a:solidFill>
@@ -27849,7 +27402,7 @@
         <p:spPr>
           <a:xfrm>
             <a:off x="3942207" y="4169664"/>
-            <a:ext cx="685800" cy="384048"/>
+            <a:ext cx="685800" cy="475488"/>
           </a:xfrm>
           <a:prstGeom prst="rect">
             <a:avLst/>
@@ -27873,7 +27426,7 @@
                 <a:ea typeface="Trebuchet MS" pitchFamily="34" charset="-122"/>
                 <a:cs typeface="Trebuchet MS" pitchFamily="34" charset="-120"/>
               </a:rPr>
-              <a:t>g</a:t>
+              <a:t>t</a:t>
             </a:r>
             <a:endParaRPr lang="en-US" sz="900" dirty="0"/>
           </a:p>
@@ -27888,11 +27441,11 @@
         <p:spPr>
           <a:xfrm>
             <a:off x="4850892" y="4169664"/>
-            <a:ext cx="685800" cy="384048"/>
+            <a:ext cx="685800" cy="475488"/>
           </a:xfrm>
           <a:prstGeom prst="rect">
             <a:avLst>
-              <a:gd name="adj" fmla="val 9524"/>
+              <a:gd name="adj" fmla="val 7692"/>
             </a:avLst>
           </a:prstGeom>
           <a:solidFill>
@@ -27915,7 +27468,7 @@
         <p:spPr>
           <a:xfrm>
             <a:off x="4850892" y="4169664"/>
-            <a:ext cx="685800" cy="384048"/>
+            <a:ext cx="685800" cy="475488"/>
           </a:xfrm>
           <a:prstGeom prst="rect">
             <a:avLst/>
@@ -27939,7 +27492,7 @@
                 <a:ea typeface="Trebuchet MS" pitchFamily="34" charset="-122"/>
                 <a:cs typeface="Trebuchet MS" pitchFamily="34" charset="-120"/>
               </a:rPr>
-              <a:t>i</a:t>
+              <a:t>u</a:t>
             </a:r>
             <a:endParaRPr lang="en-US" sz="900" dirty="0"/>
           </a:p>
@@ -27954,11 +27507,11 @@
         <p:spPr>
           <a:xfrm>
             <a:off x="5759577" y="4169664"/>
-            <a:ext cx="685800" cy="384048"/>
+            <a:ext cx="685800" cy="475488"/>
           </a:xfrm>
           <a:prstGeom prst="rect">
             <a:avLst>
-              <a:gd name="adj" fmla="val 9524"/>
+              <a:gd name="adj" fmla="val 7692"/>
             </a:avLst>
           </a:prstGeom>
           <a:solidFill>
@@ -27981,7 +27534,7 @@
         <p:spPr>
           <a:xfrm>
             <a:off x="5759577" y="4169664"/>
-            <a:ext cx="685800" cy="384048"/>
+            <a:ext cx="685800" cy="475488"/>
           </a:xfrm>
           <a:prstGeom prst="rect">
             <a:avLst/>
@@ -28005,7 +27558,7 @@
                 <a:ea typeface="Trebuchet MS" pitchFamily="34" charset="-122"/>
                 <a:cs typeface="Trebuchet MS" pitchFamily="34" charset="-120"/>
               </a:rPr>
-              <a:t>c</a:t>
+              <a:t>r</a:t>
             </a:r>
             <a:endParaRPr lang="en-US" sz="900" dirty="0"/>
           </a:p>
@@ -28013,57 +27566,18 @@
       </p:sp>
       <p:sp>
         <p:nvSpPr>
-          <p:cNvPr id="46" name="Text 44"/>
-          <p:cNvSpPr/>
-          <p:nvPr/>
-        </p:nvSpPr>
-        <p:spPr>
-          <a:xfrm>
-            <a:off x="5759577" y="4572000"/>
-            <a:ext cx="685800" cy="219456"/>
-          </a:xfrm>
-          <a:prstGeom prst="rect">
-            <a:avLst/>
-          </a:prstGeom>
-          <a:noFill/>
-          <a:ln/>
-        </p:spPr>
-        <p:txBody>
-          <a:bodyPr wrap="square" lIns="0" tIns="0" rIns="0" bIns="0" rtlCol="0" anchor="t"/>
-          <a:lstStyle/>
-          <a:p>
-            <a:pPr algn="ctr" indent="0" marL="0">
-              <a:buNone/>
-            </a:pPr>
-            <a:r>
-              <a:rPr lang="en-US" sz="750" i="1" dirty="0">
-                <a:solidFill>
-                  <a:srgbClr val="94A3B8"/>
-                </a:solidFill>
-                <a:latin typeface="Calibri" pitchFamily="34" charset="0"/>
-                <a:ea typeface="Calibri" pitchFamily="34" charset="-122"/>
-                <a:cs typeface="Calibri" pitchFamily="34" charset="-120"/>
-              </a:rPr>
-              <a:t>/k/</a:t>
-            </a:r>
-            <a:endParaRPr lang="en-US" sz="750" dirty="0"/>
-          </a:p>
-        </p:txBody>
-      </p:sp>
-      <p:sp>
-        <p:nvSpPr>
-          <p:cNvPr id="47" name="Shape 45"/>
+          <p:cNvPr id="46" name="Shape 44"/>
           <p:cNvSpPr/>
           <p:nvPr/>
         </p:nvSpPr>
         <p:spPr>
           <a:xfrm>
             <a:off x="6668262" y="4169664"/>
-            <a:ext cx="685800" cy="384048"/>
+            <a:ext cx="685800" cy="475488"/>
           </a:xfrm>
           <a:prstGeom prst="rect">
             <a:avLst>
-              <a:gd name="adj" fmla="val 9524"/>
+              <a:gd name="adj" fmla="val 7692"/>
             </a:avLst>
           </a:prstGeom>
           <a:solidFill>
@@ -28079,14 +27593,14 @@
       </p:sp>
       <p:sp>
         <p:nvSpPr>
-          <p:cNvPr id="48" name="Text 46"/>
+          <p:cNvPr id="47" name="Text 45"/>
           <p:cNvSpPr/>
           <p:nvPr/>
         </p:nvSpPr>
         <p:spPr>
           <a:xfrm>
             <a:off x="6668262" y="4169664"/>
-            <a:ext cx="685800" cy="384048"/>
+            <a:ext cx="685800" cy="475488"/>
           </a:xfrm>
           <a:prstGeom prst="rect">
             <a:avLst/>
@@ -28118,18 +27632,18 @@
       </p:sp>
       <p:sp>
         <p:nvSpPr>
-          <p:cNvPr id="49" name="Shape 47"/>
+          <p:cNvPr id="48" name="Shape 46"/>
           <p:cNvSpPr/>
           <p:nvPr/>
         </p:nvSpPr>
         <p:spPr>
           <a:xfrm>
             <a:off x="7576947" y="4169664"/>
-            <a:ext cx="685800" cy="384048"/>
+            <a:ext cx="685800" cy="475488"/>
           </a:xfrm>
           <a:prstGeom prst="rect">
             <a:avLst>
-              <a:gd name="adj" fmla="val 9524"/>
+              <a:gd name="adj" fmla="val 7692"/>
             </a:avLst>
           </a:prstGeom>
           <a:solidFill>
@@ -28145,14 +27659,14 @@
       </p:sp>
       <p:sp>
         <p:nvSpPr>
-          <p:cNvPr id="50" name="Text 48"/>
+          <p:cNvPr id="49" name="Text 47"/>
           <p:cNvSpPr/>
           <p:nvPr/>
         </p:nvSpPr>
         <p:spPr>
           <a:xfrm>
             <a:off x="7576947" y="4169664"/>
-            <a:ext cx="685800" cy="384048"/>
+            <a:ext cx="685800" cy="475488"/>
           </a:xfrm>
           <a:prstGeom prst="rect">
             <a:avLst/>
@@ -28607,7 +28121,7 @@
                 <a:ea typeface="Trebuchet MS" pitchFamily="34" charset="-122"/>
                 <a:cs typeface="Trebuchet MS" pitchFamily="34" charset="-120"/>
               </a:rPr>
-              <a:t>coastal</a:t>
+              <a:t>structural</a:t>
             </a:r>
             <a:endParaRPr lang="en-US" sz="2800" dirty="0"/>
           </a:p>
@@ -29434,7 +28948,7 @@
                 <a:ea typeface="Trebuchet MS" pitchFamily="34" charset="-122"/>
                 <a:cs typeface="Trebuchet MS" pitchFamily="34" charset="-120"/>
               </a:rPr>
-              <a:t>coastal</a:t>
+              <a:t>structural</a:t>
             </a:r>
             <a:endParaRPr lang="en-US" sz="2800" dirty="0"/>
           </a:p>
@@ -29514,7 +29028,7 @@
         </p:nvSpPr>
         <p:spPr>
           <a:xfrm>
-            <a:off x="2938272" y="2258568"/>
+            <a:off x="2221992" y="2258568"/>
             <a:ext cx="1828800" cy="292608"/>
           </a:xfrm>
           <a:prstGeom prst="rect">
@@ -29548,7 +29062,7 @@
         </p:nvSpPr>
         <p:spPr>
           <a:xfrm>
-            <a:off x="2938272" y="2258568"/>
+            <a:off x="2221992" y="2258568"/>
             <a:ext cx="1828800" cy="292608"/>
           </a:xfrm>
           <a:prstGeom prst="rect">
@@ -29573,7 +29087,7 @@
                 <a:ea typeface="Trebuchet MS" pitchFamily="34" charset="-122"/>
                 <a:cs typeface="Trebuchet MS" pitchFamily="34" charset="-120"/>
               </a:rPr>
-              <a:t>coast</a:t>
+              <a:t>struct</a:t>
             </a:r>
             <a:endParaRPr lang="en-US" sz="1300" dirty="0"/>
           </a:p>
@@ -29587,7 +29101,7 @@
         </p:nvSpPr>
         <p:spPr>
           <a:xfrm>
-            <a:off x="2938272" y="2569464"/>
+            <a:off x="2221992" y="2569464"/>
             <a:ext cx="1828800" cy="201168"/>
           </a:xfrm>
           <a:prstGeom prst="rect">
@@ -29612,7 +29126,7 @@
                 <a:ea typeface="Calibri" pitchFamily="34" charset="-122"/>
                 <a:cs typeface="Calibri" pitchFamily="34" charset="-120"/>
               </a:rPr>
-              <a:t>land beside the sea</a:t>
+              <a:t>to build</a:t>
             </a:r>
             <a:endParaRPr lang="en-US" sz="850" dirty="0"/>
           </a:p>
@@ -29626,7 +29140,7 @@
         </p:nvSpPr>
         <p:spPr>
           <a:xfrm>
-            <a:off x="5803392" y="2258568"/>
+            <a:off x="4370832" y="2258568"/>
             <a:ext cx="1828800" cy="292608"/>
           </a:xfrm>
           <a:prstGeom prst="rect">
@@ -29635,11 +29149,11 @@
             </a:avLst>
           </a:prstGeom>
           <a:solidFill>
-            <a:srgbClr val="CCFBF1"/>
+            <a:srgbClr val="FCE7F3"/>
           </a:solidFill>
           <a:ln w="19050">
             <a:solidFill>
-              <a:srgbClr val="0D9488"/>
+              <a:srgbClr val="DB2777"/>
             </a:solidFill>
             <a:prstDash val="solid"/>
           </a:ln>
@@ -29660,7 +29174,7 @@
         </p:nvSpPr>
         <p:spPr>
           <a:xfrm>
-            <a:off x="5803392" y="2258568"/>
+            <a:off x="4370832" y="2258568"/>
             <a:ext cx="1828800" cy="292608"/>
           </a:xfrm>
           <a:prstGeom prst="rect">
@@ -29679,13 +29193,13 @@
             <a:r>
               <a:rPr lang="en-US" sz="1300" b="1" dirty="0">
                 <a:solidFill>
-                  <a:srgbClr val="0F766E"/>
+                  <a:srgbClr val="9D174D"/>
                 </a:solidFill>
                 <a:latin typeface="Trebuchet MS" pitchFamily="34" charset="0"/>
                 <a:ea typeface="Trebuchet MS" pitchFamily="34" charset="-122"/>
                 <a:cs typeface="Trebuchet MS" pitchFamily="34" charset="-120"/>
               </a:rPr>
-              <a:t>al</a:t>
+              <a:t>ur</a:t>
             </a:r>
             <a:endParaRPr lang="en-US" sz="1300" dirty="0"/>
           </a:p>
@@ -29699,7 +29213,7 @@
         </p:nvSpPr>
         <p:spPr>
           <a:xfrm>
-            <a:off x="5803392" y="2569464"/>
+            <a:off x="4370832" y="2569464"/>
             <a:ext cx="1828800" cy="201168"/>
           </a:xfrm>
           <a:prstGeom prst="rect">
@@ -29724,6 +29238,118 @@
                 <a:ea typeface="Calibri" pitchFamily="34" charset="-122"/>
                 <a:cs typeface="Calibri" pitchFamily="34" charset="-120"/>
               </a:rPr>
+              <a:t>result of</a:t>
+            </a:r>
+            <a:endParaRPr lang="en-US" sz="850" dirty="0"/>
+          </a:p>
+        </p:txBody>
+      </p:sp>
+      <p:sp>
+        <p:nvSpPr>
+          <p:cNvPr id="22" name="Shape 20"/>
+          <p:cNvSpPr/>
+          <p:nvPr/>
+        </p:nvSpPr>
+        <p:spPr>
+          <a:xfrm>
+            <a:off x="6519672" y="2258568"/>
+            <a:ext cx="1828800" cy="292608"/>
+          </a:xfrm>
+          <a:prstGeom prst="rect">
+            <a:avLst>
+              <a:gd name="adj" fmla="val 25000"/>
+            </a:avLst>
+          </a:prstGeom>
+          <a:solidFill>
+            <a:srgbClr val="CCFBF1"/>
+          </a:solidFill>
+          <a:ln w="19050">
+            <a:solidFill>
+              <a:srgbClr val="0D9488"/>
+            </a:solidFill>
+            <a:prstDash val="solid"/>
+          </a:ln>
+          <a:effectLst>
+            <a:outerShdw sx="100000" sy="100000" kx="0" ky="0" algn="bl" rotWithShape="0" blurRad="101600" dist="38100" dir="8100000">
+              <a:srgbClr val="000000">
+                <a:alpha val="12000"/>
+              </a:srgbClr>
+            </a:outerShdw>
+          </a:effectLst>
+        </p:spPr>
+      </p:sp>
+      <p:sp>
+        <p:nvSpPr>
+          <p:cNvPr id="23" name="Text 21"/>
+          <p:cNvSpPr/>
+          <p:nvPr/>
+        </p:nvSpPr>
+        <p:spPr>
+          <a:xfrm>
+            <a:off x="6519672" y="2258568"/>
+            <a:ext cx="1828800" cy="292608"/>
+          </a:xfrm>
+          <a:prstGeom prst="rect">
+            <a:avLst/>
+          </a:prstGeom>
+          <a:noFill/>
+          <a:ln/>
+        </p:spPr>
+        <p:txBody>
+          <a:bodyPr wrap="square" lIns="0" tIns="0" rIns="0" bIns="0" rtlCol="0" anchor="ctr"/>
+          <a:lstStyle/>
+          <a:p>
+            <a:pPr algn="ctr" indent="0" marL="0">
+              <a:buNone/>
+            </a:pPr>
+            <a:r>
+              <a:rPr lang="en-US" sz="1300" b="1" dirty="0">
+                <a:solidFill>
+                  <a:srgbClr val="0F766E"/>
+                </a:solidFill>
+                <a:latin typeface="Trebuchet MS" pitchFamily="34" charset="0"/>
+                <a:ea typeface="Trebuchet MS" pitchFamily="34" charset="-122"/>
+                <a:cs typeface="Trebuchet MS" pitchFamily="34" charset="-120"/>
+              </a:rPr>
+              <a:t>al</a:t>
+            </a:r>
+            <a:endParaRPr lang="en-US" sz="1300" dirty="0"/>
+          </a:p>
+        </p:txBody>
+      </p:sp>
+      <p:sp>
+        <p:nvSpPr>
+          <p:cNvPr id="24" name="Text 22"/>
+          <p:cNvSpPr/>
+          <p:nvPr/>
+        </p:nvSpPr>
+        <p:spPr>
+          <a:xfrm>
+            <a:off x="6519672" y="2569464"/>
+            <a:ext cx="1828800" cy="201168"/>
+          </a:xfrm>
+          <a:prstGeom prst="rect">
+            <a:avLst/>
+          </a:prstGeom>
+          <a:noFill/>
+          <a:ln/>
+        </p:spPr>
+        <p:txBody>
+          <a:bodyPr wrap="square" lIns="0" tIns="0" rIns="0" bIns="0" rtlCol="0" anchor="t"/>
+          <a:lstStyle/>
+          <a:p>
+            <a:pPr algn="ctr" indent="0" marL="0">
+              <a:buNone/>
+            </a:pPr>
+            <a:r>
+              <a:rPr lang="en-US" sz="850" dirty="0">
+                <a:solidFill>
+                  <a:srgbClr val="475569"/>
+                </a:solidFill>
+                <a:latin typeface="Calibri" pitchFamily="34" charset="0"/>
+                <a:ea typeface="Calibri" pitchFamily="34" charset="-122"/>
+                <a:cs typeface="Calibri" pitchFamily="34" charset="-120"/>
+              </a:rPr>
               <a:t>relating to</a:t>
             </a:r>
             <a:endParaRPr lang="en-US" sz="850" dirty="0"/>
@@ -29732,7 +29358,7 @@
       </p:sp>
       <p:sp>
         <p:nvSpPr>
-          <p:cNvPr id="22" name="Shape 20"/>
+          <p:cNvPr id="25" name="Shape 23"/>
           <p:cNvSpPr/>
           <p:nvPr/>
         </p:nvSpPr>
@@ -29759,7 +29385,7 @@
       </p:sp>
       <p:sp>
         <p:nvSpPr>
-          <p:cNvPr id="23" name="Text 21"/>
+          <p:cNvPr id="26" name="Text 24"/>
           <p:cNvSpPr/>
           <p:nvPr/>
         </p:nvSpPr>
@@ -29798,7 +29424,7 @@
       </p:sp>
       <p:sp>
         <p:nvSpPr>
-          <p:cNvPr id="24" name="Shape 22"/>
+          <p:cNvPr id="27" name="Shape 25"/>
           <p:cNvSpPr/>
           <p:nvPr/>
         </p:nvSpPr>
@@ -29825,7 +29451,7 @@
       </p:sp>
       <p:sp>
         <p:nvSpPr>
-          <p:cNvPr id="25" name="Text 23"/>
+          <p:cNvPr id="28" name="Text 26"/>
           <p:cNvSpPr/>
           <p:nvPr/>
         </p:nvSpPr>
@@ -29864,7 +29490,7 @@
       </p:sp>
       <p:sp>
         <p:nvSpPr>
-          <p:cNvPr id="26" name="Shape 24"/>
+          <p:cNvPr id="29" name="Shape 27"/>
           <p:cNvSpPr/>
           <p:nvPr/>
         </p:nvSpPr>
@@ -29891,7 +29517,7 @@
       </p:sp>
       <p:sp>
         <p:nvSpPr>
-          <p:cNvPr id="27" name="Text 25"/>
+          <p:cNvPr id="30" name="Text 28"/>
           <p:cNvSpPr/>
           <p:nvPr/>
         </p:nvSpPr>
@@ -29930,7 +29556,7 @@
       </p:sp>
       <p:sp>
         <p:nvSpPr>
-          <p:cNvPr id="28" name="Shape 26"/>
+          <p:cNvPr id="31" name="Shape 29"/>
           <p:cNvSpPr/>
           <p:nvPr/>
         </p:nvSpPr>
@@ -29957,7 +29583,7 @@
       </p:sp>
       <p:sp>
         <p:nvSpPr>
-          <p:cNvPr id="29" name="Text 27"/>
+          <p:cNvPr id="32" name="Text 30"/>
           <p:cNvSpPr/>
           <p:nvPr/>
         </p:nvSpPr>
@@ -30419,7 +30045,7 @@
                 <a:ea typeface="Trebuchet MS" pitchFamily="34" charset="-122"/>
                 <a:cs typeface="Trebuchet MS" pitchFamily="34" charset="-120"/>
               </a:rPr>
-              <a:t>coastal</a:t>
+              <a:t>structural</a:t>
             </a:r>
             <a:endParaRPr lang="en-US" sz="2800" dirty="0"/>
           </a:p>
@@ -30499,7 +30125,7 @@
         </p:nvSpPr>
         <p:spPr>
           <a:xfrm>
-            <a:off x="2938272" y="2258568"/>
+            <a:off x="2221992" y="2258568"/>
             <a:ext cx="1828800" cy="292608"/>
           </a:xfrm>
           <a:prstGeom prst="rect">
@@ -30533,7 +30159,7 @@
         </p:nvSpPr>
         <p:spPr>
           <a:xfrm>
-            <a:off x="2938272" y="2258568"/>
+            <a:off x="2221992" y="2258568"/>
             <a:ext cx="1828800" cy="292608"/>
           </a:xfrm>
           <a:prstGeom prst="rect">
@@ -30558,7 +30184,7 @@
                 <a:ea typeface="Trebuchet MS" pitchFamily="34" charset="-122"/>
                 <a:cs typeface="Trebuchet MS" pitchFamily="34" charset="-120"/>
               </a:rPr>
-              <a:t>coast</a:t>
+              <a:t>struct</a:t>
             </a:r>
             <a:endParaRPr lang="en-US" sz="1300" dirty="0"/>
           </a:p>
@@ -30572,7 +30198,7 @@
         </p:nvSpPr>
         <p:spPr>
           <a:xfrm>
-            <a:off x="2938272" y="2569464"/>
+            <a:off x="2221992" y="2569464"/>
             <a:ext cx="1828800" cy="201168"/>
           </a:xfrm>
           <a:prstGeom prst="rect">
@@ -30597,7 +30223,7 @@
                 <a:ea typeface="Calibri" pitchFamily="34" charset="-122"/>
                 <a:cs typeface="Calibri" pitchFamily="34" charset="-120"/>
               </a:rPr>
-              <a:t>land beside the sea</a:t>
+              <a:t>to build</a:t>
             </a:r>
             <a:endParaRPr lang="en-US" sz="850" dirty="0"/>
           </a:p>
@@ -30611,7 +30237,7 @@
         </p:nvSpPr>
         <p:spPr>
           <a:xfrm>
-            <a:off x="5803392" y="2258568"/>
+            <a:off x="4370832" y="2258568"/>
             <a:ext cx="1828800" cy="292608"/>
           </a:xfrm>
           <a:prstGeom prst="rect">
@@ -30620,11 +30246,11 @@
             </a:avLst>
           </a:prstGeom>
           <a:solidFill>
-            <a:srgbClr val="CCFBF1"/>
+            <a:srgbClr val="FCE7F3"/>
           </a:solidFill>
           <a:ln w="19050">
             <a:solidFill>
-              <a:srgbClr val="0D9488"/>
+              <a:srgbClr val="DB2777"/>
             </a:solidFill>
             <a:prstDash val="solid"/>
           </a:ln>
@@ -30645,7 +30271,7 @@
         </p:nvSpPr>
         <p:spPr>
           <a:xfrm>
-            <a:off x="5803392" y="2258568"/>
+            <a:off x="4370832" y="2258568"/>
             <a:ext cx="1828800" cy="292608"/>
           </a:xfrm>
           <a:prstGeom prst="rect">
@@ -30664,13 +30290,13 @@
             <a:r>
               <a:rPr lang="en-US" sz="1300" b="1" dirty="0">
                 <a:solidFill>
-                  <a:srgbClr val="0F766E"/>
+                  <a:srgbClr val="9D174D"/>
                 </a:solidFill>
                 <a:latin typeface="Trebuchet MS" pitchFamily="34" charset="0"/>
                 <a:ea typeface="Trebuchet MS" pitchFamily="34" charset="-122"/>
                 <a:cs typeface="Trebuchet MS" pitchFamily="34" charset="-120"/>
               </a:rPr>
-              <a:t>al</a:t>
+              <a:t>ur</a:t>
             </a:r>
             <a:endParaRPr lang="en-US" sz="1300" dirty="0"/>
           </a:p>
@@ -30684,7 +30310,7 @@
         </p:nvSpPr>
         <p:spPr>
           <a:xfrm>
-            <a:off x="5803392" y="2569464"/>
+            <a:off x="4370832" y="2569464"/>
             <a:ext cx="1828800" cy="201168"/>
           </a:xfrm>
           <a:prstGeom prst="rect">
@@ -30709,6 +30335,118 @@
                 <a:ea typeface="Calibri" pitchFamily="34" charset="-122"/>
                 <a:cs typeface="Calibri" pitchFamily="34" charset="-120"/>
               </a:rPr>
+              <a:t>result of</a:t>
+            </a:r>
+            <a:endParaRPr lang="en-US" sz="850" dirty="0"/>
+          </a:p>
+        </p:txBody>
+      </p:sp>
+      <p:sp>
+        <p:nvSpPr>
+          <p:cNvPr id="22" name="Shape 20"/>
+          <p:cNvSpPr/>
+          <p:nvPr/>
+        </p:nvSpPr>
+        <p:spPr>
+          <a:xfrm>
+            <a:off x="6519672" y="2258568"/>
+            <a:ext cx="1828800" cy="292608"/>
+          </a:xfrm>
+          <a:prstGeom prst="rect">
+            <a:avLst>
+              <a:gd name="adj" fmla="val 25000"/>
+            </a:avLst>
+          </a:prstGeom>
+          <a:solidFill>
+            <a:srgbClr val="CCFBF1"/>
+          </a:solidFill>
+          <a:ln w="19050">
+            <a:solidFill>
+              <a:srgbClr val="0D9488"/>
+            </a:solidFill>
+            <a:prstDash val="solid"/>
+          </a:ln>
+          <a:effectLst>
+            <a:outerShdw sx="100000" sy="100000" kx="0" ky="0" algn="bl" rotWithShape="0" blurRad="101600" dist="38100" dir="8100000">
+              <a:srgbClr val="000000">
+                <a:alpha val="12000"/>
+              </a:srgbClr>
+            </a:outerShdw>
+          </a:effectLst>
+        </p:spPr>
+      </p:sp>
+      <p:sp>
+        <p:nvSpPr>
+          <p:cNvPr id="23" name="Text 21"/>
+          <p:cNvSpPr/>
+          <p:nvPr/>
+        </p:nvSpPr>
+        <p:spPr>
+          <a:xfrm>
+            <a:off x="6519672" y="2258568"/>
+            <a:ext cx="1828800" cy="292608"/>
+          </a:xfrm>
+          <a:prstGeom prst="rect">
+            <a:avLst/>
+          </a:prstGeom>
+          <a:noFill/>
+          <a:ln/>
+        </p:spPr>
+        <p:txBody>
+          <a:bodyPr wrap="square" lIns="0" tIns="0" rIns="0" bIns="0" rtlCol="0" anchor="ctr"/>
+          <a:lstStyle/>
+          <a:p>
+            <a:pPr algn="ctr" indent="0" marL="0">
+              <a:buNone/>
+            </a:pPr>
+            <a:r>
+              <a:rPr lang="en-US" sz="1300" b="1" dirty="0">
+                <a:solidFill>
+                  <a:srgbClr val="0F766E"/>
+                </a:solidFill>
+                <a:latin typeface="Trebuchet MS" pitchFamily="34" charset="0"/>
+                <a:ea typeface="Trebuchet MS" pitchFamily="34" charset="-122"/>
+                <a:cs typeface="Trebuchet MS" pitchFamily="34" charset="-120"/>
+              </a:rPr>
+              <a:t>al</a:t>
+            </a:r>
+            <a:endParaRPr lang="en-US" sz="1300" dirty="0"/>
+          </a:p>
+        </p:txBody>
+      </p:sp>
+      <p:sp>
+        <p:nvSpPr>
+          <p:cNvPr id="24" name="Text 22"/>
+          <p:cNvSpPr/>
+          <p:nvPr/>
+        </p:nvSpPr>
+        <p:spPr>
+          <a:xfrm>
+            <a:off x="6519672" y="2569464"/>
+            <a:ext cx="1828800" cy="201168"/>
+          </a:xfrm>
+          <a:prstGeom prst="rect">
+            <a:avLst/>
+          </a:prstGeom>
+          <a:noFill/>
+          <a:ln/>
+        </p:spPr>
+        <p:txBody>
+          <a:bodyPr wrap="square" lIns="0" tIns="0" rIns="0" bIns="0" rtlCol="0" anchor="t"/>
+          <a:lstStyle/>
+          <a:p>
+            <a:pPr algn="ctr" indent="0" marL="0">
+              <a:buNone/>
+            </a:pPr>
+            <a:r>
+              <a:rPr lang="en-US" sz="850" dirty="0">
+                <a:solidFill>
+                  <a:srgbClr val="475569"/>
+                </a:solidFill>
+                <a:latin typeface="Calibri" pitchFamily="34" charset="0"/>
+                <a:ea typeface="Calibri" pitchFamily="34" charset="-122"/>
+                <a:cs typeface="Calibri" pitchFamily="34" charset="-120"/>
+              </a:rPr>
               <a:t>relating to</a:t>
             </a:r>
             <a:endParaRPr lang="en-US" sz="850" dirty="0"/>
@@ -30717,7 +30455,7 @@
       </p:sp>
       <p:sp>
         <p:nvSpPr>
-          <p:cNvPr id="22" name="Shape 20"/>
+          <p:cNvPr id="25" name="Shape 23"/>
           <p:cNvSpPr/>
           <p:nvPr/>
         </p:nvSpPr>
@@ -30744,7 +30482,7 @@
       </p:sp>
       <p:sp>
         <p:nvSpPr>
-          <p:cNvPr id="23" name="Text 21"/>
+          <p:cNvPr id="26" name="Text 24"/>
           <p:cNvSpPr/>
           <p:nvPr/>
         </p:nvSpPr>
@@ -30783,7 +30521,7 @@
       </p:sp>
       <p:sp>
         <p:nvSpPr>
-          <p:cNvPr id="24" name="Shape 22"/>
+          <p:cNvPr id="27" name="Shape 25"/>
           <p:cNvSpPr/>
           <p:nvPr/>
         </p:nvSpPr>
@@ -30810,13 +30548,13 @@
       </p:sp>
       <p:sp>
         <p:nvSpPr>
-          <p:cNvPr id="25" name="Shape 23"/>
-          <p:cNvSpPr/>
-          <p:nvPr/>
-        </p:nvSpPr>
-        <p:spPr>
-          <a:xfrm>
-            <a:off x="2999232" y="3364992"/>
+          <p:cNvPr id="28" name="Shape 26"/>
+          <p:cNvSpPr/>
+          <p:nvPr/>
+        </p:nvSpPr>
+        <p:spPr>
+          <a:xfrm>
+            <a:off x="2313432" y="3364992"/>
             <a:ext cx="1645920" cy="475488"/>
           </a:xfrm>
           <a:prstGeom prst="rect">
@@ -30837,13 +30575,13 @@
       </p:sp>
       <p:sp>
         <p:nvSpPr>
-          <p:cNvPr id="26" name="Text 24"/>
-          <p:cNvSpPr/>
-          <p:nvPr/>
-        </p:nvSpPr>
-        <p:spPr>
-          <a:xfrm>
-            <a:off x="2999232" y="3364992"/>
+          <p:cNvPr id="29" name="Text 27"/>
+          <p:cNvSpPr/>
+          <p:nvPr/>
+        </p:nvSpPr>
+        <p:spPr>
+          <a:xfrm>
+            <a:off x="2313432" y="3364992"/>
             <a:ext cx="1645920" cy="475488"/>
           </a:xfrm>
           <a:prstGeom prst="rect">
@@ -30868,7 +30606,7 @@
                 <a:ea typeface="Trebuchet MS" pitchFamily="34" charset="-122"/>
                 <a:cs typeface="Trebuchet MS" pitchFamily="34" charset="-120"/>
               </a:rPr>
-              <a:t>coast</a:t>
+              <a:t>struc</a:t>
             </a:r>
             <a:endParaRPr lang="en-US" sz="1400" dirty="0"/>
           </a:p>
@@ -30876,14 +30614,14 @@
       </p:sp>
       <p:sp>
         <p:nvSpPr>
-          <p:cNvPr id="27" name="Text 25"/>
-          <p:cNvSpPr/>
-          <p:nvPr/>
-        </p:nvSpPr>
-        <p:spPr>
-          <a:xfrm>
-            <a:off x="4645152" y="3364992"/>
-            <a:ext cx="1097280" cy="475488"/>
+          <p:cNvPr id="30" name="Text 28"/>
+          <p:cNvSpPr/>
+          <p:nvPr/>
+        </p:nvSpPr>
+        <p:spPr>
+          <a:xfrm>
+            <a:off x="3959352" y="3364992"/>
+            <a:ext cx="411480" cy="475488"/>
           </a:xfrm>
           <a:prstGeom prst="rect">
             <a:avLst/>
@@ -30915,13 +30653,13 @@
       </p:sp>
       <p:sp>
         <p:nvSpPr>
-          <p:cNvPr id="28" name="Shape 26"/>
-          <p:cNvSpPr/>
-          <p:nvPr/>
-        </p:nvSpPr>
-        <p:spPr>
-          <a:xfrm>
-            <a:off x="5742432" y="3364992"/>
+          <p:cNvPr id="31" name="Shape 29"/>
+          <p:cNvSpPr/>
+          <p:nvPr/>
+        </p:nvSpPr>
+        <p:spPr>
+          <a:xfrm>
+            <a:off x="4370832" y="3364992"/>
             <a:ext cx="1645920" cy="475488"/>
           </a:xfrm>
           <a:prstGeom prst="rect">
@@ -30942,13 +30680,13 @@
       </p:sp>
       <p:sp>
         <p:nvSpPr>
-          <p:cNvPr id="29" name="Text 27"/>
-          <p:cNvSpPr/>
-          <p:nvPr/>
-        </p:nvSpPr>
-        <p:spPr>
-          <a:xfrm>
-            <a:off x="5742432" y="3364992"/>
+          <p:cNvPr id="32" name="Text 30"/>
+          <p:cNvSpPr/>
+          <p:nvPr/>
+        </p:nvSpPr>
+        <p:spPr>
+          <a:xfrm>
+            <a:off x="4370832" y="3364992"/>
             <a:ext cx="1645920" cy="475488"/>
           </a:xfrm>
           <a:prstGeom prst="rect">
@@ -30973,6 +30711,111 @@
                 <a:ea typeface="Trebuchet MS" pitchFamily="34" charset="-122"/>
                 <a:cs typeface="Trebuchet MS" pitchFamily="34" charset="-120"/>
               </a:rPr>
+              <a:t>tur</a:t>
+            </a:r>
+            <a:endParaRPr lang="en-US" sz="1400" dirty="0"/>
+          </a:p>
+        </p:txBody>
+      </p:sp>
+      <p:sp>
+        <p:nvSpPr>
+          <p:cNvPr id="33" name="Text 31"/>
+          <p:cNvSpPr/>
+          <p:nvPr/>
+        </p:nvSpPr>
+        <p:spPr>
+          <a:xfrm>
+            <a:off x="6016752" y="3364992"/>
+            <a:ext cx="411480" cy="475488"/>
+          </a:xfrm>
+          <a:prstGeom prst="rect">
+            <a:avLst/>
+          </a:prstGeom>
+          <a:noFill/>
+          <a:ln/>
+        </p:spPr>
+        <p:txBody>
+          <a:bodyPr wrap="square" lIns="0" tIns="0" rIns="0" bIns="0" rtlCol="0" anchor="ctr"/>
+          <a:lstStyle/>
+          <a:p>
+            <a:pPr algn="ctr" indent="0" marL="0">
+              <a:buNone/>
+            </a:pPr>
+            <a:r>
+              <a:rPr lang="en-US" sz="1600" b="1" dirty="0">
+                <a:solidFill>
+                  <a:srgbClr val="0D9488"/>
+                </a:solidFill>
+                <a:latin typeface="Trebuchet MS" pitchFamily="34" charset="0"/>
+                <a:ea typeface="Trebuchet MS" pitchFamily="34" charset="-122"/>
+                <a:cs typeface="Trebuchet MS" pitchFamily="34" charset="-120"/>
+              </a:rPr>
+              <a:t>·</a:t>
+            </a:r>
+            <a:endParaRPr lang="en-US" sz="1600" dirty="0"/>
+          </a:p>
+        </p:txBody>
+      </p:sp>
+      <p:sp>
+        <p:nvSpPr>
+          <p:cNvPr id="34" name="Shape 32"/>
+          <p:cNvSpPr/>
+          <p:nvPr/>
+        </p:nvSpPr>
+        <p:spPr>
+          <a:xfrm>
+            <a:off x="6428232" y="3364992"/>
+            <a:ext cx="1645920" cy="475488"/>
+          </a:xfrm>
+          <a:prstGeom prst="rect">
+            <a:avLst>
+              <a:gd name="adj" fmla="val 9615"/>
+            </a:avLst>
+          </a:prstGeom>
+          <a:solidFill>
+            <a:srgbClr val="FFFFFF"/>
+          </a:solidFill>
+          <a:ln w="12700">
+            <a:solidFill>
+              <a:srgbClr val="0D9488"/>
+            </a:solidFill>
+            <a:prstDash val="solid"/>
+          </a:ln>
+        </p:spPr>
+      </p:sp>
+      <p:sp>
+        <p:nvSpPr>
+          <p:cNvPr id="35" name="Text 33"/>
+          <p:cNvSpPr/>
+          <p:nvPr/>
+        </p:nvSpPr>
+        <p:spPr>
+          <a:xfrm>
+            <a:off x="6428232" y="3364992"/>
+            <a:ext cx="1645920" cy="475488"/>
+          </a:xfrm>
+          <a:prstGeom prst="rect">
+            <a:avLst/>
+          </a:prstGeom>
+          <a:noFill/>
+          <a:ln/>
+        </p:spPr>
+        <p:txBody>
+          <a:bodyPr wrap="square" lIns="0" tIns="0" rIns="0" bIns="0" rtlCol="0" anchor="ctr"/>
+          <a:lstStyle/>
+          <a:p>
+            <a:pPr algn="ctr" indent="0" marL="0">
+              <a:buNone/>
+            </a:pPr>
+            <a:r>
+              <a:rPr lang="en-US" sz="1400" b="1" dirty="0">
+                <a:solidFill>
+                  <a:srgbClr val="0D9488"/>
+                </a:solidFill>
+                <a:latin typeface="Trebuchet MS" pitchFamily="34" charset="0"/>
+                <a:ea typeface="Trebuchet MS" pitchFamily="34" charset="-122"/>
+                <a:cs typeface="Trebuchet MS" pitchFamily="34" charset="-120"/>
+              </a:rPr>
               <a:t>al</a:t>
             </a:r>
             <a:endParaRPr lang="en-US" sz="1400" dirty="0"/>
@@ -30981,7 +30824,7 @@
       </p:sp>
       <p:sp>
         <p:nvSpPr>
-          <p:cNvPr id="30" name="Shape 28"/>
+          <p:cNvPr id="36" name="Shape 34"/>
           <p:cNvSpPr/>
           <p:nvPr/>
         </p:nvSpPr>
@@ -31008,7 +30851,7 @@
       </p:sp>
       <p:sp>
         <p:nvSpPr>
-          <p:cNvPr id="31" name="Text 29"/>
+          <p:cNvPr id="37" name="Text 35"/>
           <p:cNvSpPr/>
           <p:nvPr/>
         </p:nvSpPr>
@@ -31047,7 +30890,7 @@
       </p:sp>
       <p:sp>
         <p:nvSpPr>
-          <p:cNvPr id="32" name="Shape 30"/>
+          <p:cNvPr id="38" name="Shape 36"/>
           <p:cNvSpPr/>
           <p:nvPr/>
         </p:nvSpPr>
@@ -31074,7 +30917,7 @@
       </p:sp>
       <p:sp>
         <p:nvSpPr>
-          <p:cNvPr id="33" name="Text 31"/>
+          <p:cNvPr id="39" name="Text 37"/>
           <p:cNvSpPr/>
           <p:nvPr/>
         </p:nvSpPr>
@@ -31536,7 +31379,7 @@
                 <a:ea typeface="Trebuchet MS" pitchFamily="34" charset="-122"/>
                 <a:cs typeface="Trebuchet MS" pitchFamily="34" charset="-120"/>
               </a:rPr>
-              <a:t>coastal</a:t>
+              <a:t>structural</a:t>
             </a:r>
             <a:endParaRPr lang="en-US" sz="2800" dirty="0"/>
           </a:p>
@@ -31616,7 +31459,7 @@
         </p:nvSpPr>
         <p:spPr>
           <a:xfrm>
-            <a:off x="2938272" y="2258568"/>
+            <a:off x="2221992" y="2258568"/>
             <a:ext cx="1828800" cy="292608"/>
           </a:xfrm>
           <a:prstGeom prst="rect">
@@ -31650,7 +31493,7 @@
         </p:nvSpPr>
         <p:spPr>
           <a:xfrm>
-            <a:off x="2938272" y="2258568"/>
+            <a:off x="2221992" y="2258568"/>
             <a:ext cx="1828800" cy="292608"/>
           </a:xfrm>
           <a:prstGeom prst="rect">
@@ -31675,7 +31518,7 @@
                 <a:ea typeface="Trebuchet MS" pitchFamily="34" charset="-122"/>
                 <a:cs typeface="Trebuchet MS" pitchFamily="34" charset="-120"/>
               </a:rPr>
-              <a:t>coast</a:t>
+              <a:t>struct</a:t>
             </a:r>
             <a:endParaRPr lang="en-US" sz="1300" dirty="0"/>
           </a:p>
@@ -31689,7 +31532,7 @@
         </p:nvSpPr>
         <p:spPr>
           <a:xfrm>
-            <a:off x="2938272" y="2569464"/>
+            <a:off x="2221992" y="2569464"/>
             <a:ext cx="1828800" cy="201168"/>
           </a:xfrm>
           <a:prstGeom prst="rect">
@@ -31714,7 +31557,7 @@
                 <a:ea typeface="Calibri" pitchFamily="34" charset="-122"/>
                 <a:cs typeface="Calibri" pitchFamily="34" charset="-120"/>
               </a:rPr>
-              <a:t>land beside the sea</a:t>
+              <a:t>to build</a:t>
             </a:r>
             <a:endParaRPr lang="en-US" sz="850" dirty="0"/>
           </a:p>
@@ -31728,7 +31571,7 @@
         </p:nvSpPr>
         <p:spPr>
           <a:xfrm>
-            <a:off x="5803392" y="2258568"/>
+            <a:off x="4370832" y="2258568"/>
             <a:ext cx="1828800" cy="292608"/>
           </a:xfrm>
           <a:prstGeom prst="rect">
@@ -31737,11 +31580,11 @@
             </a:avLst>
           </a:prstGeom>
           <a:solidFill>
-            <a:srgbClr val="CCFBF1"/>
+            <a:srgbClr val="FCE7F3"/>
           </a:solidFill>
           <a:ln w="19050">
             <a:solidFill>
-              <a:srgbClr val="0D9488"/>
+              <a:srgbClr val="DB2777"/>
             </a:solidFill>
             <a:prstDash val="solid"/>
           </a:ln>
@@ -31762,7 +31605,7 @@
         </p:nvSpPr>
         <p:spPr>
           <a:xfrm>
-            <a:off x="5803392" y="2258568"/>
+            <a:off x="4370832" y="2258568"/>
             <a:ext cx="1828800" cy="292608"/>
           </a:xfrm>
           <a:prstGeom prst="rect">
@@ -31781,13 +31624,13 @@
             <a:r>
               <a:rPr lang="en-US" sz="1300" b="1" dirty="0">
                 <a:solidFill>
-                  <a:srgbClr val="0F766E"/>
+                  <a:srgbClr val="9D174D"/>
                 </a:solidFill>
                 <a:latin typeface="Trebuchet MS" pitchFamily="34" charset="0"/>
                 <a:ea typeface="Trebuchet MS" pitchFamily="34" charset="-122"/>
                 <a:cs typeface="Trebuchet MS" pitchFamily="34" charset="-120"/>
               </a:rPr>
-              <a:t>al</a:t>
+              <a:t>ur</a:t>
             </a:r>
             <a:endParaRPr lang="en-US" sz="1300" dirty="0"/>
           </a:p>
@@ -31801,7 +31644,7 @@
         </p:nvSpPr>
         <p:spPr>
           <a:xfrm>
-            <a:off x="5803392" y="2569464"/>
+            <a:off x="4370832" y="2569464"/>
             <a:ext cx="1828800" cy="201168"/>
           </a:xfrm>
           <a:prstGeom prst="rect">
@@ -31826,6 +31669,118 @@
                 <a:ea typeface="Calibri" pitchFamily="34" charset="-122"/>
                 <a:cs typeface="Calibri" pitchFamily="34" charset="-120"/>
               </a:rPr>
+              <a:t>result of</a:t>
+            </a:r>
+            <a:endParaRPr lang="en-US" sz="850" dirty="0"/>
+          </a:p>
+        </p:txBody>
+      </p:sp>
+      <p:sp>
+        <p:nvSpPr>
+          <p:cNvPr id="22" name="Shape 20"/>
+          <p:cNvSpPr/>
+          <p:nvPr/>
+        </p:nvSpPr>
+        <p:spPr>
+          <a:xfrm>
+            <a:off x="6519672" y="2258568"/>
+            <a:ext cx="1828800" cy="292608"/>
+          </a:xfrm>
+          <a:prstGeom prst="rect">
+            <a:avLst>
+              <a:gd name="adj" fmla="val 25000"/>
+            </a:avLst>
+          </a:prstGeom>
+          <a:solidFill>
+            <a:srgbClr val="CCFBF1"/>
+          </a:solidFill>
+          <a:ln w="19050">
+            <a:solidFill>
+              <a:srgbClr val="0D9488"/>
+            </a:solidFill>
+            <a:prstDash val="solid"/>
+          </a:ln>
+          <a:effectLst>
+            <a:outerShdw sx="100000" sy="100000" kx="0" ky="0" algn="bl" rotWithShape="0" blurRad="101600" dist="38100" dir="8100000">
+              <a:srgbClr val="000000">
+                <a:alpha val="12000"/>
+              </a:srgbClr>
+            </a:outerShdw>
+          </a:effectLst>
+        </p:spPr>
+      </p:sp>
+      <p:sp>
+        <p:nvSpPr>
+          <p:cNvPr id="23" name="Text 21"/>
+          <p:cNvSpPr/>
+          <p:nvPr/>
+        </p:nvSpPr>
+        <p:spPr>
+          <a:xfrm>
+            <a:off x="6519672" y="2258568"/>
+            <a:ext cx="1828800" cy="292608"/>
+          </a:xfrm>
+          <a:prstGeom prst="rect">
+            <a:avLst/>
+          </a:prstGeom>
+          <a:noFill/>
+          <a:ln/>
+        </p:spPr>
+        <p:txBody>
+          <a:bodyPr wrap="square" lIns="0" tIns="0" rIns="0" bIns="0" rtlCol="0" anchor="ctr"/>
+          <a:lstStyle/>
+          <a:p>
+            <a:pPr algn="ctr" indent="0" marL="0">
+              <a:buNone/>
+            </a:pPr>
+            <a:r>
+              <a:rPr lang="en-US" sz="1300" b="1" dirty="0">
+                <a:solidFill>
+                  <a:srgbClr val="0F766E"/>
+                </a:solidFill>
+                <a:latin typeface="Trebuchet MS" pitchFamily="34" charset="0"/>
+                <a:ea typeface="Trebuchet MS" pitchFamily="34" charset="-122"/>
+                <a:cs typeface="Trebuchet MS" pitchFamily="34" charset="-120"/>
+              </a:rPr>
+              <a:t>al</a:t>
+            </a:r>
+            <a:endParaRPr lang="en-US" sz="1300" dirty="0"/>
+          </a:p>
+        </p:txBody>
+      </p:sp>
+      <p:sp>
+        <p:nvSpPr>
+          <p:cNvPr id="24" name="Text 22"/>
+          <p:cNvSpPr/>
+          <p:nvPr/>
+        </p:nvSpPr>
+        <p:spPr>
+          <a:xfrm>
+            <a:off x="6519672" y="2569464"/>
+            <a:ext cx="1828800" cy="201168"/>
+          </a:xfrm>
+          <a:prstGeom prst="rect">
+            <a:avLst/>
+          </a:prstGeom>
+          <a:noFill/>
+          <a:ln/>
+        </p:spPr>
+        <p:txBody>
+          <a:bodyPr wrap="square" lIns="0" tIns="0" rIns="0" bIns="0" rtlCol="0" anchor="t"/>
+          <a:lstStyle/>
+          <a:p>
+            <a:pPr algn="ctr" indent="0" marL="0">
+              <a:buNone/>
+            </a:pPr>
+            <a:r>
+              <a:rPr lang="en-US" sz="850" dirty="0">
+                <a:solidFill>
+                  <a:srgbClr val="475569"/>
+                </a:solidFill>
+                <a:latin typeface="Calibri" pitchFamily="34" charset="0"/>
+                <a:ea typeface="Calibri" pitchFamily="34" charset="-122"/>
+                <a:cs typeface="Calibri" pitchFamily="34" charset="-120"/>
+              </a:rPr>
               <a:t>relating to</a:t>
             </a:r>
             <a:endParaRPr lang="en-US" sz="850" dirty="0"/>
@@ -31834,7 +31789,7 @@
       </p:sp>
       <p:sp>
         <p:nvSpPr>
-          <p:cNvPr id="22" name="Shape 20"/>
+          <p:cNvPr id="25" name="Shape 23"/>
           <p:cNvSpPr/>
           <p:nvPr/>
         </p:nvSpPr>
@@ -31861,7 +31816,7 @@
       </p:sp>
       <p:sp>
         <p:nvSpPr>
-          <p:cNvPr id="23" name="Text 21"/>
+          <p:cNvPr id="26" name="Text 24"/>
           <p:cNvSpPr/>
           <p:nvPr/>
         </p:nvSpPr>
@@ -31900,7 +31855,7 @@
       </p:sp>
       <p:sp>
         <p:nvSpPr>
-          <p:cNvPr id="24" name="Shape 22"/>
+          <p:cNvPr id="27" name="Shape 25"/>
           <p:cNvSpPr/>
           <p:nvPr/>
         </p:nvSpPr>
@@ -31927,13 +31882,13 @@
       </p:sp>
       <p:sp>
         <p:nvSpPr>
-          <p:cNvPr id="25" name="Shape 23"/>
-          <p:cNvSpPr/>
-          <p:nvPr/>
-        </p:nvSpPr>
-        <p:spPr>
-          <a:xfrm>
-            <a:off x="2999232" y="3364992"/>
+          <p:cNvPr id="28" name="Shape 26"/>
+          <p:cNvSpPr/>
+          <p:nvPr/>
+        </p:nvSpPr>
+        <p:spPr>
+          <a:xfrm>
+            <a:off x="2313432" y="3364992"/>
             <a:ext cx="1645920" cy="475488"/>
           </a:xfrm>
           <a:prstGeom prst="rect">
@@ -31954,13 +31909,13 @@
       </p:sp>
       <p:sp>
         <p:nvSpPr>
-          <p:cNvPr id="26" name="Text 24"/>
-          <p:cNvSpPr/>
-          <p:nvPr/>
-        </p:nvSpPr>
-        <p:spPr>
-          <a:xfrm>
-            <a:off x="2999232" y="3364992"/>
+          <p:cNvPr id="29" name="Text 27"/>
+          <p:cNvSpPr/>
+          <p:nvPr/>
+        </p:nvSpPr>
+        <p:spPr>
+          <a:xfrm>
+            <a:off x="2313432" y="3364992"/>
             <a:ext cx="1645920" cy="475488"/>
           </a:xfrm>
           <a:prstGeom prst="rect">
@@ -31985,7 +31940,7 @@
                 <a:ea typeface="Trebuchet MS" pitchFamily="34" charset="-122"/>
                 <a:cs typeface="Trebuchet MS" pitchFamily="34" charset="-120"/>
               </a:rPr>
-              <a:t>coast</a:t>
+              <a:t>struc</a:t>
             </a:r>
             <a:endParaRPr lang="en-US" sz="1400" dirty="0"/>
           </a:p>
@@ -31993,14 +31948,14 @@
       </p:sp>
       <p:sp>
         <p:nvSpPr>
-          <p:cNvPr id="27" name="Text 25"/>
-          <p:cNvSpPr/>
-          <p:nvPr/>
-        </p:nvSpPr>
-        <p:spPr>
-          <a:xfrm>
-            <a:off x="4645152" y="3364992"/>
-            <a:ext cx="1097280" cy="475488"/>
+          <p:cNvPr id="30" name="Text 28"/>
+          <p:cNvSpPr/>
+          <p:nvPr/>
+        </p:nvSpPr>
+        <p:spPr>
+          <a:xfrm>
+            <a:off x="3959352" y="3364992"/>
+            <a:ext cx="411480" cy="475488"/>
           </a:xfrm>
           <a:prstGeom prst="rect">
             <a:avLst/>
@@ -32032,13 +31987,13 @@
       </p:sp>
       <p:sp>
         <p:nvSpPr>
-          <p:cNvPr id="28" name="Shape 26"/>
-          <p:cNvSpPr/>
-          <p:nvPr/>
-        </p:nvSpPr>
-        <p:spPr>
-          <a:xfrm>
-            <a:off x="5742432" y="3364992"/>
+          <p:cNvPr id="31" name="Shape 29"/>
+          <p:cNvSpPr/>
+          <p:nvPr/>
+        </p:nvSpPr>
+        <p:spPr>
+          <a:xfrm>
+            <a:off x="4370832" y="3364992"/>
             <a:ext cx="1645920" cy="475488"/>
           </a:xfrm>
           <a:prstGeom prst="rect">
@@ -32059,13 +32014,13 @@
       </p:sp>
       <p:sp>
         <p:nvSpPr>
-          <p:cNvPr id="29" name="Text 27"/>
-          <p:cNvSpPr/>
-          <p:nvPr/>
-        </p:nvSpPr>
-        <p:spPr>
-          <a:xfrm>
-            <a:off x="5742432" y="3364992"/>
+          <p:cNvPr id="32" name="Text 30"/>
+          <p:cNvSpPr/>
+          <p:nvPr/>
+        </p:nvSpPr>
+        <p:spPr>
+          <a:xfrm>
+            <a:off x="4370832" y="3364992"/>
             <a:ext cx="1645920" cy="475488"/>
           </a:xfrm>
           <a:prstGeom prst="rect">
@@ -32090,6 +32045,111 @@
                 <a:ea typeface="Trebuchet MS" pitchFamily="34" charset="-122"/>
                 <a:cs typeface="Trebuchet MS" pitchFamily="34" charset="-120"/>
               </a:rPr>
+              <a:t>tur</a:t>
+            </a:r>
+            <a:endParaRPr lang="en-US" sz="1400" dirty="0"/>
+          </a:p>
+        </p:txBody>
+      </p:sp>
+      <p:sp>
+        <p:nvSpPr>
+          <p:cNvPr id="33" name="Text 31"/>
+          <p:cNvSpPr/>
+          <p:nvPr/>
+        </p:nvSpPr>
+        <p:spPr>
+          <a:xfrm>
+            <a:off x="6016752" y="3364992"/>
+            <a:ext cx="411480" cy="475488"/>
+          </a:xfrm>
+          <a:prstGeom prst="rect">
+            <a:avLst/>
+          </a:prstGeom>
+          <a:noFill/>
+          <a:ln/>
+        </p:spPr>
+        <p:txBody>
+          <a:bodyPr wrap="square" lIns="0" tIns="0" rIns="0" bIns="0" rtlCol="0" anchor="ctr"/>
+          <a:lstStyle/>
+          <a:p>
+            <a:pPr algn="ctr" indent="0" marL="0">
+              <a:buNone/>
+            </a:pPr>
+            <a:r>
+              <a:rPr lang="en-US" sz="1600" b="1" dirty="0">
+                <a:solidFill>
+                  <a:srgbClr val="0D9488"/>
+                </a:solidFill>
+                <a:latin typeface="Trebuchet MS" pitchFamily="34" charset="0"/>
+                <a:ea typeface="Trebuchet MS" pitchFamily="34" charset="-122"/>
+                <a:cs typeface="Trebuchet MS" pitchFamily="34" charset="-120"/>
+              </a:rPr>
+              <a:t>·</a:t>
+            </a:r>
+            <a:endParaRPr lang="en-US" sz="1600" dirty="0"/>
+          </a:p>
+        </p:txBody>
+      </p:sp>
+      <p:sp>
+        <p:nvSpPr>
+          <p:cNvPr id="34" name="Shape 32"/>
+          <p:cNvSpPr/>
+          <p:nvPr/>
+        </p:nvSpPr>
+        <p:spPr>
+          <a:xfrm>
+            <a:off x="6428232" y="3364992"/>
+            <a:ext cx="1645920" cy="475488"/>
+          </a:xfrm>
+          <a:prstGeom prst="rect">
+            <a:avLst>
+              <a:gd name="adj" fmla="val 9615"/>
+            </a:avLst>
+          </a:prstGeom>
+          <a:solidFill>
+            <a:srgbClr val="FFFFFF"/>
+          </a:solidFill>
+          <a:ln w="12700">
+            <a:solidFill>
+              <a:srgbClr val="0D9488"/>
+            </a:solidFill>
+            <a:prstDash val="solid"/>
+          </a:ln>
+        </p:spPr>
+      </p:sp>
+      <p:sp>
+        <p:nvSpPr>
+          <p:cNvPr id="35" name="Text 33"/>
+          <p:cNvSpPr/>
+          <p:nvPr/>
+        </p:nvSpPr>
+        <p:spPr>
+          <a:xfrm>
+            <a:off x="6428232" y="3364992"/>
+            <a:ext cx="1645920" cy="475488"/>
+          </a:xfrm>
+          <a:prstGeom prst="rect">
+            <a:avLst/>
+          </a:prstGeom>
+          <a:noFill/>
+          <a:ln/>
+        </p:spPr>
+        <p:txBody>
+          <a:bodyPr wrap="square" lIns="0" tIns="0" rIns="0" bIns="0" rtlCol="0" anchor="ctr"/>
+          <a:lstStyle/>
+          <a:p>
+            <a:pPr algn="ctr" indent="0" marL="0">
+              <a:buNone/>
+            </a:pPr>
+            <a:r>
+              <a:rPr lang="en-US" sz="1400" b="1" dirty="0">
+                <a:solidFill>
+                  <a:srgbClr val="0D9488"/>
+                </a:solidFill>
+                <a:latin typeface="Trebuchet MS" pitchFamily="34" charset="0"/>
+                <a:ea typeface="Trebuchet MS" pitchFamily="34" charset="-122"/>
+                <a:cs typeface="Trebuchet MS" pitchFamily="34" charset="-120"/>
+              </a:rPr>
               <a:t>al</a:t>
             </a:r>
             <a:endParaRPr lang="en-US" sz="1400" dirty="0"/>
@@ -32098,7 +32158,7 @@
       </p:sp>
       <p:sp>
         <p:nvSpPr>
-          <p:cNvPr id="30" name="Shape 28"/>
+          <p:cNvPr id="36" name="Shape 34"/>
           <p:cNvSpPr/>
           <p:nvPr/>
         </p:nvSpPr>
@@ -32125,7 +32185,7 @@
       </p:sp>
       <p:sp>
         <p:nvSpPr>
-          <p:cNvPr id="31" name="Text 29"/>
+          <p:cNvPr id="37" name="Text 35"/>
           <p:cNvSpPr/>
           <p:nvPr/>
         </p:nvSpPr>
@@ -32164,7 +32224,7 @@
       </p:sp>
       <p:sp>
         <p:nvSpPr>
-          <p:cNvPr id="32" name="Shape 30"/>
+          <p:cNvPr id="38" name="Shape 36"/>
           <p:cNvSpPr/>
           <p:nvPr/>
         </p:nvSpPr>
@@ -32191,14 +32251,14 @@
       </p:sp>
       <p:sp>
         <p:nvSpPr>
-          <p:cNvPr id="33" name="Shape 31"/>
-          <p:cNvSpPr/>
-          <p:nvPr/>
-        </p:nvSpPr>
-        <p:spPr>
-          <a:xfrm>
-            <a:off x="2254649" y="4169664"/>
-            <a:ext cx="685800" cy="384048"/>
+          <p:cNvPr id="39" name="Shape 37"/>
+          <p:cNvSpPr/>
+          <p:nvPr/>
+        </p:nvSpPr>
+        <p:spPr>
+          <a:xfrm>
+            <a:off x="1951330" y="4169664"/>
+            <a:ext cx="676656" cy="384048"/>
           </a:xfrm>
           <a:prstGeom prst="rect">
             <a:avLst>
@@ -32218,14 +32278,14 @@
       </p:sp>
       <p:sp>
         <p:nvSpPr>
-          <p:cNvPr id="34" name="Text 32"/>
-          <p:cNvSpPr/>
-          <p:nvPr/>
-        </p:nvSpPr>
-        <p:spPr>
-          <a:xfrm>
-            <a:off x="2254649" y="4169664"/>
-            <a:ext cx="685800" cy="384048"/>
+          <p:cNvPr id="40" name="Text 38"/>
+          <p:cNvSpPr/>
+          <p:nvPr/>
+        </p:nvSpPr>
+        <p:spPr>
+          <a:xfrm>
+            <a:off x="1951330" y="4169664"/>
+            <a:ext cx="676656" cy="384048"/>
           </a:xfrm>
           <a:prstGeom prst="rect">
             <a:avLst/>
@@ -32249,6 +32309,270 @@
                 <a:ea typeface="Trebuchet MS" pitchFamily="34" charset="-122"/>
                 <a:cs typeface="Trebuchet MS" pitchFamily="34" charset="-120"/>
               </a:rPr>
+              <a:t>s</a:t>
+            </a:r>
+            <a:endParaRPr lang="en-US" sz="900" dirty="0"/>
+          </a:p>
+        </p:txBody>
+      </p:sp>
+      <p:sp>
+        <p:nvSpPr>
+          <p:cNvPr id="41" name="Shape 39"/>
+          <p:cNvSpPr/>
+          <p:nvPr/>
+        </p:nvSpPr>
+        <p:spPr>
+          <a:xfrm>
+            <a:off x="2677363" y="4169664"/>
+            <a:ext cx="676656" cy="384048"/>
+          </a:xfrm>
+          <a:prstGeom prst="rect">
+            <a:avLst>
+              <a:gd name="adj" fmla="val 9524"/>
+            </a:avLst>
+          </a:prstGeom>
+          <a:solidFill>
+            <a:srgbClr val="FFFFFF"/>
+          </a:solidFill>
+          <a:ln w="12700">
+            <a:solidFill>
+              <a:srgbClr val="DB2777"/>
+            </a:solidFill>
+            <a:prstDash val="solid"/>
+          </a:ln>
+        </p:spPr>
+      </p:sp>
+      <p:sp>
+        <p:nvSpPr>
+          <p:cNvPr id="42" name="Text 40"/>
+          <p:cNvSpPr/>
+          <p:nvPr/>
+        </p:nvSpPr>
+        <p:spPr>
+          <a:xfrm>
+            <a:off x="2677363" y="4169664"/>
+            <a:ext cx="676656" cy="384048"/>
+          </a:xfrm>
+          <a:prstGeom prst="rect">
+            <a:avLst/>
+          </a:prstGeom>
+          <a:noFill/>
+          <a:ln/>
+        </p:spPr>
+        <p:txBody>
+          <a:bodyPr wrap="square" lIns="0" tIns="0" rIns="0" bIns="0" rtlCol="0" anchor="ctr"/>
+          <a:lstStyle/>
+          <a:p>
+            <a:pPr algn="ctr" indent="0" marL="0">
+              <a:buNone/>
+            </a:pPr>
+            <a:r>
+              <a:rPr lang="en-US" sz="900" b="1" dirty="0">
+                <a:solidFill>
+                  <a:srgbClr val="9D174D"/>
+                </a:solidFill>
+                <a:latin typeface="Trebuchet MS" pitchFamily="34" charset="0"/>
+                <a:ea typeface="Trebuchet MS" pitchFamily="34" charset="-122"/>
+                <a:cs typeface="Trebuchet MS" pitchFamily="34" charset="-120"/>
+              </a:rPr>
+              <a:t>t</a:t>
+            </a:r>
+            <a:endParaRPr lang="en-US" sz="900" dirty="0"/>
+          </a:p>
+        </p:txBody>
+      </p:sp>
+      <p:sp>
+        <p:nvSpPr>
+          <p:cNvPr id="43" name="Shape 41"/>
+          <p:cNvSpPr/>
+          <p:nvPr/>
+        </p:nvSpPr>
+        <p:spPr>
+          <a:xfrm>
+            <a:off x="3403397" y="4169664"/>
+            <a:ext cx="676656" cy="384048"/>
+          </a:xfrm>
+          <a:prstGeom prst="rect">
+            <a:avLst>
+              <a:gd name="adj" fmla="val 9524"/>
+            </a:avLst>
+          </a:prstGeom>
+          <a:solidFill>
+            <a:srgbClr val="FFFFFF"/>
+          </a:solidFill>
+          <a:ln w="12700">
+            <a:solidFill>
+              <a:srgbClr val="DB2777"/>
+            </a:solidFill>
+            <a:prstDash val="solid"/>
+          </a:ln>
+        </p:spPr>
+      </p:sp>
+      <p:sp>
+        <p:nvSpPr>
+          <p:cNvPr id="44" name="Text 42"/>
+          <p:cNvSpPr/>
+          <p:nvPr/>
+        </p:nvSpPr>
+        <p:spPr>
+          <a:xfrm>
+            <a:off x="3403397" y="4169664"/>
+            <a:ext cx="676656" cy="384048"/>
+          </a:xfrm>
+          <a:prstGeom prst="rect">
+            <a:avLst/>
+          </a:prstGeom>
+          <a:noFill/>
+          <a:ln/>
+        </p:spPr>
+        <p:txBody>
+          <a:bodyPr wrap="square" lIns="0" tIns="0" rIns="0" bIns="0" rtlCol="0" anchor="ctr"/>
+          <a:lstStyle/>
+          <a:p>
+            <a:pPr algn="ctr" indent="0" marL="0">
+              <a:buNone/>
+            </a:pPr>
+            <a:r>
+              <a:rPr lang="en-US" sz="900" b="1" dirty="0">
+                <a:solidFill>
+                  <a:srgbClr val="9D174D"/>
+                </a:solidFill>
+                <a:latin typeface="Trebuchet MS" pitchFamily="34" charset="0"/>
+                <a:ea typeface="Trebuchet MS" pitchFamily="34" charset="-122"/>
+                <a:cs typeface="Trebuchet MS" pitchFamily="34" charset="-120"/>
+              </a:rPr>
+              <a:t>r</a:t>
+            </a:r>
+            <a:endParaRPr lang="en-US" sz="900" dirty="0"/>
+          </a:p>
+        </p:txBody>
+      </p:sp>
+      <p:sp>
+        <p:nvSpPr>
+          <p:cNvPr id="45" name="Shape 43"/>
+          <p:cNvSpPr/>
+          <p:nvPr/>
+        </p:nvSpPr>
+        <p:spPr>
+          <a:xfrm>
+            <a:off x="4129430" y="4169664"/>
+            <a:ext cx="676656" cy="384048"/>
+          </a:xfrm>
+          <a:prstGeom prst="rect">
+            <a:avLst>
+              <a:gd name="adj" fmla="val 9524"/>
+            </a:avLst>
+          </a:prstGeom>
+          <a:solidFill>
+            <a:srgbClr val="FFFFFF"/>
+          </a:solidFill>
+          <a:ln w="12700">
+            <a:solidFill>
+              <a:srgbClr val="DB2777"/>
+            </a:solidFill>
+            <a:prstDash val="solid"/>
+          </a:ln>
+        </p:spPr>
+      </p:sp>
+      <p:sp>
+        <p:nvSpPr>
+          <p:cNvPr id="46" name="Text 44"/>
+          <p:cNvSpPr/>
+          <p:nvPr/>
+        </p:nvSpPr>
+        <p:spPr>
+          <a:xfrm>
+            <a:off x="4129430" y="4169664"/>
+            <a:ext cx="676656" cy="384048"/>
+          </a:xfrm>
+          <a:prstGeom prst="rect">
+            <a:avLst/>
+          </a:prstGeom>
+          <a:noFill/>
+          <a:ln/>
+        </p:spPr>
+        <p:txBody>
+          <a:bodyPr wrap="square" lIns="0" tIns="0" rIns="0" bIns="0" rtlCol="0" anchor="ctr"/>
+          <a:lstStyle/>
+          <a:p>
+            <a:pPr algn="ctr" indent="0" marL="0">
+              <a:buNone/>
+            </a:pPr>
+            <a:r>
+              <a:rPr lang="en-US" sz="900" b="1" dirty="0">
+                <a:solidFill>
+                  <a:srgbClr val="9D174D"/>
+                </a:solidFill>
+                <a:latin typeface="Trebuchet MS" pitchFamily="34" charset="0"/>
+                <a:ea typeface="Trebuchet MS" pitchFamily="34" charset="-122"/>
+                <a:cs typeface="Trebuchet MS" pitchFamily="34" charset="-120"/>
+              </a:rPr>
+              <a:t>u</a:t>
+            </a:r>
+            <a:endParaRPr lang="en-US" sz="900" dirty="0"/>
+          </a:p>
+        </p:txBody>
+      </p:sp>
+      <p:sp>
+        <p:nvSpPr>
+          <p:cNvPr id="47" name="Shape 45"/>
+          <p:cNvSpPr/>
+          <p:nvPr/>
+        </p:nvSpPr>
+        <p:spPr>
+          <a:xfrm>
+            <a:off x="4855464" y="4169664"/>
+            <a:ext cx="676656" cy="384048"/>
+          </a:xfrm>
+          <a:prstGeom prst="rect">
+            <a:avLst>
+              <a:gd name="adj" fmla="val 9524"/>
+            </a:avLst>
+          </a:prstGeom>
+          <a:solidFill>
+            <a:srgbClr val="FFFFFF"/>
+          </a:solidFill>
+          <a:ln w="12700">
+            <a:solidFill>
+              <a:srgbClr val="DB2777"/>
+            </a:solidFill>
+            <a:prstDash val="solid"/>
+          </a:ln>
+        </p:spPr>
+      </p:sp>
+      <p:sp>
+        <p:nvSpPr>
+          <p:cNvPr id="48" name="Text 46"/>
+          <p:cNvSpPr/>
+          <p:nvPr/>
+        </p:nvSpPr>
+        <p:spPr>
+          <a:xfrm>
+            <a:off x="4855464" y="4169664"/>
+            <a:ext cx="676656" cy="384048"/>
+          </a:xfrm>
+          <a:prstGeom prst="rect">
+            <a:avLst/>
+          </a:prstGeom>
+          <a:noFill/>
+          <a:ln/>
+        </p:spPr>
+        <p:txBody>
+          <a:bodyPr wrap="square" lIns="0" tIns="0" rIns="0" bIns="0" rtlCol="0" anchor="ctr"/>
+          <a:lstStyle/>
+          <a:p>
+            <a:pPr algn="ctr" indent="0" marL="0">
+              <a:buNone/>
+            </a:pPr>
+            <a:r>
+              <a:rPr lang="en-US" sz="900" b="1" dirty="0">
+                <a:solidFill>
+                  <a:srgbClr val="9D174D"/>
+                </a:solidFill>
+                <a:latin typeface="Trebuchet MS" pitchFamily="34" charset="0"/>
+                <a:ea typeface="Trebuchet MS" pitchFamily="34" charset="-122"/>
+                <a:cs typeface="Trebuchet MS" pitchFamily="34" charset="-120"/>
+              </a:rPr>
               <a:t>c</a:t>
             </a:r>
             <a:endParaRPr lang="en-US" sz="900" dirty="0"/>
@@ -32257,14 +32581,14 @@
       </p:sp>
       <p:sp>
         <p:nvSpPr>
-          <p:cNvPr id="35" name="Text 33"/>
-          <p:cNvSpPr/>
-          <p:nvPr/>
-        </p:nvSpPr>
-        <p:spPr>
-          <a:xfrm>
-            <a:off x="2254649" y="4572000"/>
-            <a:ext cx="685800" cy="219456"/>
+          <p:cNvPr id="49" name="Text 47"/>
+          <p:cNvSpPr/>
+          <p:nvPr/>
+        </p:nvSpPr>
+        <p:spPr>
+          <a:xfrm>
+            <a:off x="4855464" y="4572000"/>
+            <a:ext cx="676656" cy="219456"/>
           </a:xfrm>
           <a:prstGeom prst="rect">
             <a:avLst/>
@@ -32296,14 +32620,14 @@
       </p:sp>
       <p:sp>
         <p:nvSpPr>
-          <p:cNvPr id="36" name="Shape 34"/>
-          <p:cNvSpPr/>
-          <p:nvPr/>
-        </p:nvSpPr>
-        <p:spPr>
-          <a:xfrm>
-            <a:off x="3293146" y="4169664"/>
-            <a:ext cx="685800" cy="384048"/>
+          <p:cNvPr id="50" name="Shape 48"/>
+          <p:cNvSpPr/>
+          <p:nvPr/>
+        </p:nvSpPr>
+        <p:spPr>
+          <a:xfrm>
+            <a:off x="5581498" y="4169664"/>
+            <a:ext cx="676656" cy="384048"/>
           </a:xfrm>
           <a:prstGeom prst="rect">
             <a:avLst>
@@ -32323,14 +32647,14 @@
       </p:sp>
       <p:sp>
         <p:nvSpPr>
-          <p:cNvPr id="37" name="Text 35"/>
-          <p:cNvSpPr/>
-          <p:nvPr/>
-        </p:nvSpPr>
-        <p:spPr>
-          <a:xfrm>
-            <a:off x="3293146" y="4169664"/>
-            <a:ext cx="685800" cy="384048"/>
+          <p:cNvPr id="51" name="Text 49"/>
+          <p:cNvSpPr/>
+          <p:nvPr/>
+        </p:nvSpPr>
+        <p:spPr>
+          <a:xfrm>
+            <a:off x="5581498" y="4169664"/>
+            <a:ext cx="676656" cy="384048"/>
           </a:xfrm>
           <a:prstGeom prst="rect">
             <a:avLst/>
@@ -32354,7 +32678,7 @@
                 <a:ea typeface="Trebuchet MS" pitchFamily="34" charset="-122"/>
                 <a:cs typeface="Trebuchet MS" pitchFamily="34" charset="-120"/>
               </a:rPr>
-              <a:t>oa</a:t>
+              <a:t>t</a:t>
             </a:r>
             <a:endParaRPr lang="en-US" sz="900" dirty="0"/>
           </a:p>
@@ -32362,14 +32686,14 @@
       </p:sp>
       <p:sp>
         <p:nvSpPr>
-          <p:cNvPr id="38" name="Shape 36"/>
-          <p:cNvSpPr/>
-          <p:nvPr/>
-        </p:nvSpPr>
-        <p:spPr>
-          <a:xfrm>
-            <a:off x="4331643" y="4169664"/>
-            <a:ext cx="685800" cy="384048"/>
+          <p:cNvPr id="52" name="Shape 50"/>
+          <p:cNvSpPr/>
+          <p:nvPr/>
+        </p:nvSpPr>
+        <p:spPr>
+          <a:xfrm>
+            <a:off x="6307531" y="4169664"/>
+            <a:ext cx="676656" cy="384048"/>
           </a:xfrm>
           <a:prstGeom prst="rect">
             <a:avLst>
@@ -32389,14 +32713,14 @@
       </p:sp>
       <p:sp>
         <p:nvSpPr>
-          <p:cNvPr id="39" name="Text 37"/>
-          <p:cNvSpPr/>
-          <p:nvPr/>
-        </p:nvSpPr>
-        <p:spPr>
-          <a:xfrm>
-            <a:off x="4331643" y="4169664"/>
-            <a:ext cx="685800" cy="384048"/>
+          <p:cNvPr id="53" name="Text 51"/>
+          <p:cNvSpPr/>
+          <p:nvPr/>
+        </p:nvSpPr>
+        <p:spPr>
+          <a:xfrm>
+            <a:off x="6307531" y="4169664"/>
+            <a:ext cx="676656" cy="384048"/>
           </a:xfrm>
           <a:prstGeom prst="rect">
             <a:avLst/>
@@ -32420,7 +32744,7 @@
                 <a:ea typeface="Trebuchet MS" pitchFamily="34" charset="-122"/>
                 <a:cs typeface="Trebuchet MS" pitchFamily="34" charset="-120"/>
               </a:rPr>
-              <a:t>s</a:t>
+              <a:t>ur</a:t>
             </a:r>
             <a:endParaRPr lang="en-US" sz="900" dirty="0"/>
           </a:p>
@@ -32428,14 +32752,14 @@
       </p:sp>
       <p:sp>
         <p:nvSpPr>
-          <p:cNvPr id="40" name="Shape 38"/>
-          <p:cNvSpPr/>
-          <p:nvPr/>
-        </p:nvSpPr>
-        <p:spPr>
-          <a:xfrm>
-            <a:off x="5370141" y="4169664"/>
-            <a:ext cx="685800" cy="384048"/>
+          <p:cNvPr id="54" name="Shape 52"/>
+          <p:cNvSpPr/>
+          <p:nvPr/>
+        </p:nvSpPr>
+        <p:spPr>
+          <a:xfrm>
+            <a:off x="7033565" y="4169664"/>
+            <a:ext cx="676656" cy="384048"/>
           </a:xfrm>
           <a:prstGeom prst="rect">
             <a:avLst>
@@ -32455,14 +32779,14 @@
       </p:sp>
       <p:sp>
         <p:nvSpPr>
-          <p:cNvPr id="41" name="Text 39"/>
-          <p:cNvSpPr/>
-          <p:nvPr/>
-        </p:nvSpPr>
-        <p:spPr>
-          <a:xfrm>
-            <a:off x="5370141" y="4169664"/>
-            <a:ext cx="685800" cy="384048"/>
+          <p:cNvPr id="55" name="Text 53"/>
+          <p:cNvSpPr/>
+          <p:nvPr/>
+        </p:nvSpPr>
+        <p:spPr>
+          <a:xfrm>
+            <a:off x="7033565" y="4169664"/>
+            <a:ext cx="676656" cy="384048"/>
           </a:xfrm>
           <a:prstGeom prst="rect">
             <a:avLst/>
@@ -32486,7 +32810,7 @@
                 <a:ea typeface="Trebuchet MS" pitchFamily="34" charset="-122"/>
                 <a:cs typeface="Trebuchet MS" pitchFamily="34" charset="-120"/>
               </a:rPr>
-              <a:t>t</a:t>
+              <a:t>a</a:t>
             </a:r>
             <a:endParaRPr lang="en-US" sz="900" dirty="0"/>
           </a:p>
@@ -32494,14 +32818,14 @@
       </p:sp>
       <p:sp>
         <p:nvSpPr>
-          <p:cNvPr id="42" name="Shape 40"/>
-          <p:cNvSpPr/>
-          <p:nvPr/>
-        </p:nvSpPr>
-        <p:spPr>
-          <a:xfrm>
-            <a:off x="6408638" y="4169664"/>
-            <a:ext cx="685800" cy="384048"/>
+          <p:cNvPr id="56" name="Shape 54"/>
+          <p:cNvSpPr/>
+          <p:nvPr/>
+        </p:nvSpPr>
+        <p:spPr>
+          <a:xfrm>
+            <a:off x="7759598" y="4169664"/>
+            <a:ext cx="676656" cy="384048"/>
           </a:xfrm>
           <a:prstGeom prst="rect">
             <a:avLst>
@@ -32521,80 +32845,14 @@
       </p:sp>
       <p:sp>
         <p:nvSpPr>
-          <p:cNvPr id="43" name="Text 41"/>
-          <p:cNvSpPr/>
-          <p:nvPr/>
-        </p:nvSpPr>
-        <p:spPr>
-          <a:xfrm>
-            <a:off x="6408638" y="4169664"/>
-            <a:ext cx="685800" cy="384048"/>
-          </a:xfrm>
-          <a:prstGeom prst="rect">
-            <a:avLst/>
-          </a:prstGeom>
-          <a:noFill/>
-          <a:ln/>
-        </p:spPr>
-        <p:txBody>
-          <a:bodyPr wrap="square" lIns="0" tIns="0" rIns="0" bIns="0" rtlCol="0" anchor="ctr"/>
-          <a:lstStyle/>
-          <a:p>
-            <a:pPr algn="ctr" indent="0" marL="0">
-              <a:buNone/>
-            </a:pPr>
-            <a:r>
-              <a:rPr lang="en-US" sz="900" b="1" dirty="0">
-                <a:solidFill>
-                  <a:srgbClr val="9D174D"/>
-                </a:solidFill>
-                <a:latin typeface="Trebuchet MS" pitchFamily="34" charset="0"/>
-                <a:ea typeface="Trebuchet MS" pitchFamily="34" charset="-122"/>
-                <a:cs typeface="Trebuchet MS" pitchFamily="34" charset="-120"/>
-              </a:rPr>
-              <a:t>a</a:t>
-            </a:r>
-            <a:endParaRPr lang="en-US" sz="900" dirty="0"/>
-          </a:p>
-        </p:txBody>
-      </p:sp>
-      <p:sp>
-        <p:nvSpPr>
-          <p:cNvPr id="44" name="Shape 42"/>
-          <p:cNvSpPr/>
-          <p:nvPr/>
-        </p:nvSpPr>
-        <p:spPr>
-          <a:xfrm>
-            <a:off x="7447135" y="4169664"/>
-            <a:ext cx="685800" cy="384048"/>
-          </a:xfrm>
-          <a:prstGeom prst="rect">
-            <a:avLst>
-              <a:gd name="adj" fmla="val 9524"/>
-            </a:avLst>
-          </a:prstGeom>
-          <a:solidFill>
-            <a:srgbClr val="FFFFFF"/>
-          </a:solidFill>
-          <a:ln w="12700">
-            <a:solidFill>
-              <a:srgbClr val="DB2777"/>
-            </a:solidFill>
-            <a:prstDash val="solid"/>
-          </a:ln>
-        </p:spPr>
-      </p:sp>
-      <p:sp>
-        <p:nvSpPr>
-          <p:cNvPr id="45" name="Text 43"/>
-          <p:cNvSpPr/>
-          <p:nvPr/>
-        </p:nvSpPr>
-        <p:spPr>
-          <a:xfrm>
-            <a:off x="7447135" y="4169664"/>
-            <a:ext cx="685800" cy="384048"/>
+          <p:cNvPr id="57" name="Text 55"/>
+          <p:cNvSpPr/>
+          <p:nvPr/>
+        </p:nvSpPr>
+        <p:spPr>
+          <a:xfrm>
+            <a:off x="7759598" y="4169664"/>
+            <a:ext cx="676656" cy="384048"/>
           </a:xfrm>
           <a:prstGeom prst="rect">
             <a:avLst/>
@@ -34725,7 +34983,7 @@
                 <a:ea typeface="Trebuchet MS" pitchFamily="34" charset="-122"/>
                 <a:cs typeface="Trebuchet MS" pitchFamily="34" charset="-120"/>
               </a:rPr>
-              <a:t>un-</a:t>
+              <a:t>dis-</a:t>
             </a:r>
             <a:endParaRPr lang="en-US" sz="1300" dirty="0"/>
           </a:p>
@@ -34878,7 +35136,7 @@
                 <a:ea typeface="Trebuchet MS" pitchFamily="34" charset="-122"/>
                 <a:cs typeface="Trebuchet MS" pitchFamily="34" charset="-120"/>
               </a:rPr>
-              <a:t>in-</a:t>
+              <a:t>over-</a:t>
             </a:r>
             <a:endParaRPr lang="en-US" sz="1300" dirty="0"/>
           </a:p>
@@ -35031,7 +35289,7 @@
                 <a:ea typeface="Trebuchet MS" pitchFamily="34" charset="-122"/>
                 <a:cs typeface="Trebuchet MS" pitchFamily="34" charset="-120"/>
               </a:rPr>
-              <a:t>pre-</a:t>
+              <a:t>un-</a:t>
             </a:r>
             <a:endParaRPr lang="en-US" sz="1300" dirty="0"/>
           </a:p>
@@ -35621,7 +35879,7 @@
                 <a:ea typeface="Trebuchet MS" pitchFamily="34" charset="-122"/>
                 <a:cs typeface="Trebuchet MS" pitchFamily="34" charset="-120"/>
               </a:rPr>
-              <a:t>personal</a:t>
+              <a:t>original</a:t>
             </a:r>
             <a:endParaRPr lang="en-US" sz="1200" dirty="0"/>
           </a:p>
@@ -36875,7 +37133,7 @@
                 <a:ea typeface="Calibri" pitchFamily="34" charset="-122"/>
                 <a:cs typeface="Calibri" pitchFamily="34" charset="-120"/>
               </a:rPr>
-              <a:t>1.  The suffix '-al' can turn a noun into an adjective meaning 'relating to'.</a:t>
+              <a:t>1.  The suffix '-al' can mean 'relating to' something.</a:t>
             </a:r>
             <a:endParaRPr lang="en-US" sz="1300" dirty="0"/>
           </a:p>
@@ -37014,7 +37272,7 @@
                 <a:ea typeface="Calibri" pitchFamily="34" charset="-122"/>
                 <a:cs typeface="Calibri" pitchFamily="34" charset="-120"/>
               </a:rPr>
-              <a:t>2.  The suffix '-al' comes from a Greek word meaning 'without'.</a:t>
+              <a:t>2.  The word 'coastal' contains the suffix '-al'.</a:t>
             </a:r>
             <a:endParaRPr lang="en-US" sz="1300" dirty="0"/>
           </a:p>
@@ -37037,11 +37295,11 @@
             </a:avLst>
           </a:prstGeom>
           <a:solidFill>
-            <a:srgbClr val="FEE2E2"/>
-          </a:solidFill>
-          <a:ln w="12700">
-            <a:solidFill>
-              <a:srgbClr val="DC2626"/>
+            <a:srgbClr val="DCFCE7"/>
+          </a:solidFill>
+          <a:ln w="12700">
+            <a:solidFill>
+              <a:srgbClr val="16A34A"/>
             </a:solidFill>
             <a:prstDash val="solid"/>
           </a:ln>
@@ -37074,13 +37332,13 @@
             <a:r>
               <a:rPr lang="en-US" sz="1100" b="1" dirty="0">
                 <a:solidFill>
-                  <a:srgbClr val="DC2626"/>
+                  <a:srgbClr val="16A34A"/>
                 </a:solidFill>
                 <a:latin typeface="Trebuchet MS" pitchFamily="34" charset="0"/>
                 <a:ea typeface="Trebuchet MS" pitchFamily="34" charset="-122"/>
                 <a:cs typeface="Trebuchet MS" pitchFamily="34" charset="-120"/>
               </a:rPr>
-              <a:t>FALSE</a:t>
+              <a:t>TRUE</a:t>
             </a:r>
             <a:endParaRPr lang="en-US" sz="1100" dirty="0"/>
           </a:p>
@@ -37153,7 +37411,7 @@
                 <a:ea typeface="Calibri" pitchFamily="34" charset="-122"/>
                 <a:cs typeface="Calibri" pitchFamily="34" charset="-120"/>
               </a:rPr>
-              <a:t>3.  The word 'musical' contains the suffix '-al'.</a:t>
+              <a:t>3.  Adding '-al' to a base word makes it into a verb.</a:t>
             </a:r>
             <a:endParaRPr lang="en-US" sz="1300" dirty="0"/>
           </a:p>
@@ -37176,11 +37434,11 @@
             </a:avLst>
           </a:prstGeom>
           <a:solidFill>
-            <a:srgbClr val="DCFCE7"/>
-          </a:solidFill>
-          <a:ln w="12700">
-            <a:solidFill>
-              <a:srgbClr val="16A34A"/>
+            <a:srgbClr val="FEE2E2"/>
+          </a:solidFill>
+          <a:ln w="12700">
+            <a:solidFill>
+              <a:srgbClr val="DC2626"/>
             </a:solidFill>
             <a:prstDash val="solid"/>
           </a:ln>
@@ -37213,13 +37471,13 @@
             <a:r>
               <a:rPr lang="en-US" sz="1100" b="1" dirty="0">
                 <a:solidFill>
-                  <a:srgbClr val="16A34A"/>
+                  <a:srgbClr val="DC2626"/>
                 </a:solidFill>
                 <a:latin typeface="Trebuchet MS" pitchFamily="34" charset="0"/>
                 <a:ea typeface="Trebuchet MS" pitchFamily="34" charset="-122"/>
                 <a:cs typeface="Trebuchet MS" pitchFamily="34" charset="-120"/>
               </a:rPr>
-              <a:t>TRUE</a:t>
+              <a:t>FALSE</a:t>
             </a:r>
             <a:endParaRPr lang="en-US" sz="1100" dirty="0"/>
           </a:p>
@@ -37292,7 +37550,7 @@
                 <a:ea typeface="Calibri" pitchFamily="34" charset="-122"/>
                 <a:cs typeface="Calibri" pitchFamily="34" charset="-120"/>
               </a:rPr>
-              <a:t>4.  Adding '-al' to a base word often creates a describing word (adjective).</a:t>
+              <a:t>4.  '-al' comes from a Latin origin.</a:t>
             </a:r>
             <a:endParaRPr lang="en-US" sz="1300" dirty="0"/>
           </a:p>
@@ -37431,7 +37689,7 @@
                 <a:ea typeface="Calibri" pitchFamily="34" charset="-122"/>
                 <a:cs typeface="Calibri" pitchFamily="34" charset="-120"/>
               </a:rPr>
-              <a:t>5.  The suffix '-al' means 'full of' just like the suffix '-ful'.</a:t>
+              <a:t>5.  The suffix '-al' always changes the meaning of a word to mean 'without'.</a:t>
             </a:r>
             <a:endParaRPr lang="en-US" sz="1300" dirty="0"/>
           </a:p>
@@ -38466,7 +38724,7 @@
                 <a:ea typeface="Trebuchet MS" pitchFamily="34" charset="-122"/>
                 <a:cs typeface="Trebuchet MS" pitchFamily="34" charset="-120"/>
               </a:rPr>
-              <a:t>personal</a:t>
+              <a:t>original</a:t>
             </a:r>
             <a:endParaRPr lang="en-US" sz="1300" dirty="0"/>
           </a:p>
@@ -39404,7 +39662,7 @@
                 <a:ea typeface="Trebuchet MS" pitchFamily="34" charset="-122"/>
                 <a:cs typeface="Trebuchet MS" pitchFamily="34" charset="-120"/>
               </a:rPr>
-              <a:t>un-</a:t>
+              <a:t>dis-</a:t>
             </a:r>
             <a:endParaRPr lang="en-US" sz="1300" dirty="0"/>
           </a:p>
@@ -39557,7 +39815,7 @@
                 <a:ea typeface="Trebuchet MS" pitchFamily="34" charset="-122"/>
                 <a:cs typeface="Trebuchet MS" pitchFamily="34" charset="-120"/>
               </a:rPr>
-              <a:t>in-</a:t>
+              <a:t>over-</a:t>
             </a:r>
             <a:endParaRPr lang="en-US" sz="1300" dirty="0"/>
           </a:p>
@@ -39710,7 +39968,7 @@
                 <a:ea typeface="Trebuchet MS" pitchFamily="34" charset="-122"/>
                 <a:cs typeface="Trebuchet MS" pitchFamily="34" charset="-120"/>
               </a:rPr>
-              <a:t>pre-</a:t>
+              <a:t>un-</a:t>
             </a:r>
             <a:endParaRPr lang="en-US" sz="1300" dirty="0"/>
           </a:p>
@@ -40710,7 +40968,7 @@
                 <a:ea typeface="Calibri" pitchFamily="34" charset="-122"/>
                 <a:cs typeface="Calibri" pitchFamily="34" charset="-120"/>
               </a:rPr>
-              <a:t>Relating to a whole country or nation.</a:t>
+              <a:t>Relating to a whole country or nation, like a national holiday.</a:t>
             </a:r>
             <a:endParaRPr lang="en-US" sz="1200" dirty="0"/>
           </a:p>
@@ -40849,7 +41107,7 @@
                 <a:ea typeface="Calibri" pitchFamily="34" charset="-122"/>
                 <a:cs typeface="Calibri" pitchFamily="34" charset="-120"/>
               </a:rPr>
-              <a:t>Relating to the area near the sea or coast.</a:t>
+              <a:t>Relating to the coast — the land that is next to the sea.</a:t>
             </a:r>
             <a:endParaRPr lang="en-US" sz="1200" dirty="0"/>
           </a:p>
@@ -40988,7 +41246,7 @@
                 <a:ea typeface="Calibri" pitchFamily="34" charset="-122"/>
                 <a:cs typeface="Calibri" pitchFamily="34" charset="-120"/>
               </a:rPr>
-              <a:t>Happening during a particular season of the year.</a:t>
+              <a:t>Relating to a particular season, like seasonal fruit that only grows in summer.</a:t>
             </a:r>
             <a:endParaRPr lang="en-US" sz="1200" dirty="0"/>
           </a:p>
@@ -41127,7 +41385,7 @@
                 <a:ea typeface="Calibri" pitchFamily="34" charset="-122"/>
                 <a:cs typeface="Calibri" pitchFamily="34" charset="-120"/>
               </a:rPr>
-              <a:t>Something that seems to involve magic or is wonderfully exciting.</a:t>
+              <a:t>Something that seems to involve magic or is so wonderful it feels like magic.</a:t>
             </a:r>
             <a:endParaRPr lang="en-US" sz="1200" dirty="0"/>
           </a:p>
@@ -41266,7 +41524,7 @@
                 <a:ea typeface="Calibri" pitchFamily="34" charset="-122"/>
                 <a:cs typeface="Calibri" pitchFamily="34" charset="-120"/>
               </a:rPr>
-              <a:t>Belonging to or affecting one particular person.</a:t>
+              <a:t>The very first version of something, or something that is new and never done before.</a:t>
             </a:r>
             <a:endParaRPr lang="en-US" sz="1200" dirty="0"/>
           </a:p>
@@ -41405,7 +41663,7 @@
                 <a:ea typeface="Calibri" pitchFamily="34" charset="-122"/>
                 <a:cs typeface="Calibri" pitchFamily="34" charset="-120"/>
               </a:rPr>
-              <a:t>Something found in nature, not made by people.</a:t>
+              <a:t>Something that comes from nature and is not made by people, like fresh air or a forest.</a:t>
             </a:r>
             <a:endParaRPr lang="en-US" sz="1200" dirty="0"/>
           </a:p>
@@ -41478,7 +41736,7 @@
                 <a:ea typeface="Trebuchet MS" pitchFamily="34" charset="-122"/>
                 <a:cs typeface="Trebuchet MS" pitchFamily="34" charset="-120"/>
               </a:rPr>
-              <a:t>personal</a:t>
+              <a:t>original</a:t>
             </a:r>
             <a:endParaRPr lang="en-US" sz="1200" dirty="0"/>
           </a:p>
@@ -41544,7 +41802,7 @@
                 <a:ea typeface="Calibri" pitchFamily="34" charset="-122"/>
                 <a:cs typeface="Calibri" pitchFamily="34" charset="-120"/>
               </a:rPr>
-              <a:t>Relating to music or having a talent for music.</a:t>
+              <a:t>Relating to music, or someone who is good at making or playing music.</a:t>
             </a:r>
             <a:endParaRPr lang="en-US" sz="1200" dirty="0"/>
           </a:p>
@@ -42039,7 +42297,7 @@
                 <a:ea typeface="Calibri" pitchFamily="34" charset="-122"/>
                 <a:cs typeface="Calibri" pitchFamily="34" charset="-120"/>
               </a:rPr>
-              <a:t>The national park is home to many unusual animals.</a:t>
+              <a:t>The tropical rainforest is full of amazing animals and colourful birds.</a:t>
             </a:r>
             <a:endParaRPr lang="en-US" sz="1500" dirty="0"/>
           </a:p>
@@ -42203,7 +42461,7 @@
                 <a:ea typeface="Calibri" pitchFamily="34" charset="-122"/>
                 <a:cs typeface="Calibri" pitchFamily="34" charset="-120"/>
               </a:rPr>
-              <a:t>We could hear magical music coming from the coastal village.</a:t>
+              <a:t>Our class learned about the national parks that protect Australia's natural environment.</a:t>
             </a:r>
             <a:endParaRPr lang="en-US" sz="1500" dirty="0"/>
           </a:p>
@@ -42367,7 +42625,7 @@
                 <a:ea typeface="Calibri" pitchFamily="34" charset="-122"/>
                 <a:cs typeface="Calibri" pitchFamily="34" charset="-120"/>
               </a:rPr>
-              <a:t>Our teacher gave us a personal invitation to the musical performance.</a:t>
+              <a:t>She has a musical talent and can play the piano beautifully.</a:t>
             </a:r>
             <a:endParaRPr lang="en-US" sz="1500" dirty="0"/>
           </a:p>
